--- a/slides/ring_page_draft.pptx
+++ b/slides/ring_page_draft.pptx
@@ -3096,7 +3096,7 @@
         </p:nvSpPr>
         <p:spPr>
           <a:xfrm>
-            <a:off x="548640" y="402336"/>
+            <a:off x="548640" y="237744"/>
             <a:ext cx="64008" cy="347472"/>
           </a:xfrm>
           <a:prstGeom prst="rect">
@@ -3125,7 +3125,7 @@
         </p:nvSpPr>
         <p:spPr>
           <a:xfrm>
-            <a:off x="749808" y="301752"/>
+            <a:off x="749808" y="137160"/>
             <a:ext cx="6949440" cy="548640"/>
           </a:xfrm>
           <a:prstGeom prst="rect">
@@ -3166,13 +3166,136 @@
       </p:sp>
       <p:sp>
         <p:nvSpPr>
-          <p:cNvPr id="4" name="Rectangle 3"/>
+          <p:cNvPr id="4" name="TextBox 3"/>
+          <p:cNvSpPr txBox="1"/>
+          <p:nvPr/>
+        </p:nvSpPr>
+        <p:spPr>
+          <a:xfrm>
+            <a:off x="749808" y="566928"/>
+            <a:ext cx="7680960" cy="237744"/>
+          </a:xfrm>
+          <a:prstGeom prst="rect">
+            <a:avLst/>
+          </a:prstGeom>
+          <a:noFill/>
+        </p:spPr>
+        <p:txBody>
+          <a:bodyPr wrap="square" anchor="ctr" lIns="0" tIns="0" rIns="0" bIns="0">
+            <a:noAutofit/>
+          </a:bodyPr>
+          <a:lstStyle/>
+          <a:p>
+            <a:pPr algn="l" latinLnBrk="0">
+              <a:lnSpc>
+                <a:spcPct val="100000"/>
+              </a:lnSpc>
+              <a:spcBef>
+                <a:spcPts val="0"/>
+              </a:spcBef>
+              <a:spcAft>
+                <a:spcPts val="0"/>
+              </a:spcAft>
+            </a:pPr>
+            <a:r>
+              <a:rPr sz="1000" b="0">
+                <a:solidFill>
+                  <a:srgbClr val="66727F"/>
+                </a:solidFill>
+                <a:latin typeface="Microsoft YaHei"/>
+                <a:ea typeface="Microsoft YaHei"/>
+                <a:cs typeface="Microsoft YaHei"/>
+              </a:rPr>
+              <a:t>不绑定具体模型：每个组件做什么、把什么交给下一个、在哪一步会被拦下</a:t>
+            </a:r>
+          </a:p>
+        </p:txBody>
+      </p:sp>
+      <p:sp>
+        <p:nvSpPr>
+          <p:cNvPr id="5" name="Rectangle 4"/>
           <p:cNvSpPr/>
           <p:nvPr/>
         </p:nvSpPr>
         <p:spPr>
           <a:xfrm>
-            <a:off x="10960624" y="530352"/>
+            <a:off x="10663504" y="274320"/>
+            <a:ext cx="109728" cy="109728"/>
+          </a:xfrm>
+          <a:prstGeom prst="rect">
+            <a:avLst/>
+          </a:prstGeom>
+          <a:solidFill>
+            <a:srgbClr val="35424F"/>
+          </a:solidFill>
+          <a:ln>
+            <a:noFill/>
+          </a:ln>
+        </p:spPr>
+        <p:txBody>
+          <a:bodyPr rtlCol="0" anchor="ctr"/>
+          <a:lstStyle/>
+          <a:p>
+            <a:pPr algn="ctr"/>
+          </a:p>
+        </p:txBody>
+      </p:sp>
+      <p:sp>
+        <p:nvSpPr>
+          <p:cNvPr id="6" name="TextBox 5"/>
+          <p:cNvSpPr txBox="1"/>
+          <p:nvPr/>
+        </p:nvSpPr>
+        <p:spPr>
+          <a:xfrm>
+            <a:off x="10828096" y="201168"/>
+            <a:ext cx="814959" cy="256032"/>
+          </a:xfrm>
+          <a:prstGeom prst="rect">
+            <a:avLst/>
+          </a:prstGeom>
+          <a:noFill/>
+        </p:spPr>
+        <p:txBody>
+          <a:bodyPr wrap="square" anchor="ctr" lIns="0" tIns="0" rIns="0" bIns="0">
+            <a:noAutofit/>
+          </a:bodyPr>
+          <a:lstStyle/>
+          <a:p>
+            <a:pPr algn="l" latinLnBrk="0">
+              <a:lnSpc>
+                <a:spcPct val="100000"/>
+              </a:lnSpc>
+              <a:spcBef>
+                <a:spcPts val="0"/>
+              </a:spcBef>
+              <a:spcAft>
+                <a:spcPts val="0"/>
+              </a:spcAft>
+            </a:pPr>
+            <a:r>
+              <a:rPr sz="900" b="0">
+                <a:solidFill>
+                  <a:srgbClr val="66727F"/>
+                </a:solidFill>
+                <a:latin typeface="Microsoft YaHei"/>
+                <a:ea typeface="Microsoft YaHei"/>
+                <a:cs typeface="Microsoft YaHei"/>
+              </a:rPr>
+              <a:t>人 · 按需介入</a:t>
+            </a:r>
+          </a:p>
+        </p:txBody>
+      </p:sp>
+      <p:sp>
+        <p:nvSpPr>
+          <p:cNvPr id="7" name="Rectangle 6"/>
+          <p:cNvSpPr/>
+          <p:nvPr/>
+        </p:nvSpPr>
+        <p:spPr>
+          <a:xfrm>
+            <a:off x="9771964" y="274320"/>
             <a:ext cx="109728" cy="109728"/>
           </a:xfrm>
           <a:prstGeom prst="rect">
@@ -3195,14 +3318,14 @@
       </p:sp>
       <p:sp>
         <p:nvSpPr>
-          <p:cNvPr id="5" name="TextBox 4"/>
+          <p:cNvPr id="8" name="TextBox 7"/>
           <p:cNvSpPr txBox="1"/>
           <p:nvPr/>
         </p:nvSpPr>
         <p:spPr>
           <a:xfrm>
-            <a:off x="11125216" y="457200"/>
-            <a:ext cx="517839" cy="256032"/>
+            <a:off x="9936556" y="201168"/>
+            <a:ext cx="525780" cy="256032"/>
           </a:xfrm>
           <a:prstGeom prst="rect">
             <a:avLst/>
@@ -3242,13 +3365,13 @@
       </p:sp>
       <p:sp>
         <p:nvSpPr>
-          <p:cNvPr id="6" name="Rectangle 5"/>
+          <p:cNvPr id="9" name="Rectangle 8"/>
           <p:cNvSpPr/>
           <p:nvPr/>
         </p:nvSpPr>
         <p:spPr>
           <a:xfrm>
-            <a:off x="9433094" y="530352"/>
+            <a:off x="8196910" y="274320"/>
             <a:ext cx="109728" cy="109728"/>
           </a:xfrm>
           <a:prstGeom prst="rect">
@@ -3271,14 +3394,14 @@
       </p:sp>
       <p:sp>
         <p:nvSpPr>
-          <p:cNvPr id="7" name="TextBox 6"/>
+          <p:cNvPr id="10" name="TextBox 9"/>
           <p:cNvSpPr txBox="1"/>
           <p:nvPr/>
         </p:nvSpPr>
         <p:spPr>
           <a:xfrm>
-            <a:off x="9597686" y="457200"/>
-            <a:ext cx="1143481" cy="256032"/>
+            <a:off x="8361502" y="201168"/>
+            <a:ext cx="1209293" cy="256032"/>
           </a:xfrm>
           <a:prstGeom prst="rect">
             <a:avLst/>
@@ -3311,20 +3434,20 @@
                 <a:ea typeface="Microsoft YaHei"/>
                 <a:cs typeface="Microsoft YaHei"/>
               </a:rPr>
-              <a:t>规划器层 · 外部托管</a:t>
-            </a:r>
-          </a:p>
-        </p:txBody>
-      </p:sp>
-      <p:sp>
-        <p:nvSpPr>
-          <p:cNvPr id="8" name="Rectangle 7"/>
+              <a:t>规划器层 · 外部会话</a:t>
+            </a:r>
+          </a:p>
+        </p:txBody>
+      </p:sp>
+      <p:sp>
+        <p:nvSpPr>
+          <p:cNvPr id="11" name="Rectangle 10"/>
           <p:cNvSpPr/>
           <p:nvPr/>
         </p:nvSpPr>
         <p:spPr>
           <a:xfrm>
-            <a:off x="8651523" y="530352"/>
+            <a:off x="7436815" y="274320"/>
             <a:ext cx="109728" cy="109728"/>
           </a:xfrm>
           <a:prstGeom prst="rect">
@@ -3347,14 +3470,14 @@
       </p:sp>
       <p:sp>
         <p:nvSpPr>
-          <p:cNvPr id="9" name="TextBox 8"/>
+          <p:cNvPr id="12" name="TextBox 11"/>
           <p:cNvSpPr txBox="1"/>
           <p:nvPr/>
         </p:nvSpPr>
         <p:spPr>
           <a:xfrm>
-            <a:off x="8816115" y="457200"/>
-            <a:ext cx="397523" cy="256032"/>
+            <a:off x="7601407" y="201168"/>
+            <a:ext cx="394334" cy="256032"/>
           </a:xfrm>
           <a:prstGeom prst="rect">
             <a:avLst/>
@@ -3394,13 +3517,13 @@
       </p:sp>
       <p:sp>
         <p:nvSpPr>
-          <p:cNvPr id="10" name="TextBox 9"/>
+          <p:cNvPr id="13" name="TextBox 12"/>
           <p:cNvSpPr txBox="1"/>
           <p:nvPr/>
         </p:nvSpPr>
         <p:spPr>
           <a:xfrm>
-            <a:off x="6613855" y="713232"/>
+            <a:off x="6613855" y="475488"/>
             <a:ext cx="5029200" cy="182880"/>
           </a:xfrm>
           <a:prstGeom prst="rect">
@@ -3434,21 +3557,21 @@
                 <a:ea typeface="Microsoft YaHei"/>
                 <a:cs typeface="Microsoft YaHei"/>
               </a:rPr>
-              <a:t>24 个模块全部在图上 · codex/m100-selfiterate-30b-20261019 @ 04f3965 · 快照 2026-10-20 01:11 UTC</a:t>
-            </a:r>
-          </a:p>
-        </p:txBody>
-      </p:sp>
-      <p:sp>
-        <p:nvSpPr>
-          <p:cNvPr id="11" name="Rectangle 10"/>
+              <a:t>全链路 24 个核心模块 · 本页只讲机制，单次运行的数据见记录页</a:t>
+            </a:r>
+          </a:p>
+        </p:txBody>
+      </p:sp>
+      <p:sp>
+        <p:nvSpPr>
+          <p:cNvPr id="14" name="Rectangle 13"/>
           <p:cNvSpPr/>
           <p:nvPr/>
         </p:nvSpPr>
         <p:spPr>
           <a:xfrm>
-            <a:off x="548640" y="914400"/>
-            <a:ext cx="3291840" cy="822960"/>
+            <a:off x="548640" y="868680"/>
+            <a:ext cx="11094415" cy="475488"/>
           </a:xfrm>
           <a:prstGeom prst="rect">
             <a:avLst/>
@@ -3473,14 +3596,14 @@
       </p:sp>
       <p:sp>
         <p:nvSpPr>
-          <p:cNvPr id="12" name="TextBox 11"/>
+          <p:cNvPr id="15" name="TextBox 14"/>
           <p:cNvSpPr txBox="1"/>
           <p:nvPr/>
         </p:nvSpPr>
         <p:spPr>
           <a:xfrm>
-            <a:off x="676656" y="969264"/>
-            <a:ext cx="3035808" cy="201168"/>
+            <a:off x="694944" y="886968"/>
+            <a:ext cx="10801807" cy="438912"/>
           </a:xfrm>
           <a:prstGeom prst="rect">
             <a:avLst/>
@@ -3501,7 +3624,7 @@
                 <a:spcPts val="0"/>
               </a:spcBef>
               <a:spcAft>
-                <a:spcPts val="0"/>
+                <a:spcPts val="100"/>
               </a:spcAft>
             </a:pPr>
             <a:r>
@@ -3513,32 +3636,9 @@
                 <a:ea typeface="Microsoft YaHei"/>
                 <a:cs typeface="Microsoft YaHei"/>
               </a:rPr>
-              <a:t>合同 · 冻结并哈希校验</a:t>
-            </a:r>
-          </a:p>
-        </p:txBody>
-      </p:sp>
-      <p:sp>
-        <p:nvSpPr>
-          <p:cNvPr id="13" name="TextBox 12"/>
-          <p:cNvSpPr txBox="1"/>
-          <p:nvPr/>
-        </p:nvSpPr>
-        <p:spPr>
-          <a:xfrm>
-            <a:off x="676656" y="1188720"/>
-            <a:ext cx="3035808" cy="512064"/>
-          </a:xfrm>
-          <a:prstGeom prst="rect">
-            <a:avLst/>
-          </a:prstGeom>
-          <a:noFill/>
-        </p:spPr>
-        <p:txBody>
-          <a:bodyPr wrap="square" anchor="t" lIns="0" tIns="0" rIns="0" bIns="0">
-            <a:noAutofit/>
-          </a:bodyPr>
-          <a:lstStyle/>
+              <a:t>任务契约 · 冻结并哈希校验</a:t>
+            </a:r>
+          </a:p>
           <a:p>
             <a:pPr algn="l" latinLnBrk="0">
               <a:lnSpc>
@@ -3573,19 +3673,17 @@
               </a:rPr>
               <a:t>　模型 / 精度 / 负载 / 门限 / 预算</a:t>
             </a:r>
-          </a:p>
-          <a:p>
-            <a:pPr algn="l" latinLnBrk="0">
-              <a:lnSpc>
-                <a:spcPct val="100000"/>
-              </a:lnSpc>
-              <a:spcBef>
-                <a:spcPts val="0"/>
-              </a:spcBef>
-              <a:spcAft>
-                <a:spcPts val="0"/>
-              </a:spcAft>
-            </a:pPr>
+            <a:r>
+              <a:rPr sz="800" b="0">
+                <a:solidFill>
+                  <a:srgbClr val="C5CCD4"/>
+                </a:solidFill>
+                <a:latin typeface="Microsoft YaHei"/>
+                <a:ea typeface="Microsoft YaHei"/>
+                <a:cs typeface="Microsoft YaHei"/>
+              </a:rPr>
+              <a:t>　｜　</a:t>
+            </a:r>
             <a:r>
               <a:rPr sz="750" b="0">
                 <a:solidFill>
@@ -3606,21 +3704,19 @@
                 <a:ea typeface="Microsoft YaHei"/>
                 <a:cs typeface="Microsoft YaHei"/>
               </a:rPr>
-              <a:t>　数值探针 + 质量合同</a:t>
-            </a:r>
-          </a:p>
-          <a:p>
-            <a:pPr algn="l" latinLnBrk="0">
-              <a:lnSpc>
-                <a:spcPct val="100000"/>
-              </a:lnSpc>
-              <a:spcBef>
-                <a:spcPts val="0"/>
-              </a:spcBef>
-              <a:spcAft>
-                <a:spcPts val="0"/>
-              </a:spcAft>
-            </a:pPr>
+              <a:t>　数值探针 + 质量契约</a:t>
+            </a:r>
+            <a:r>
+              <a:rPr sz="800" b="0">
+                <a:solidFill>
+                  <a:srgbClr val="C5CCD4"/>
+                </a:solidFill>
+                <a:latin typeface="Microsoft YaHei"/>
+                <a:ea typeface="Microsoft YaHei"/>
+                <a:cs typeface="Microsoft YaHei"/>
+              </a:rPr>
+              <a:t>　｜　</a:t>
+            </a:r>
             <a:r>
               <a:rPr sz="750" b="0">
                 <a:solidFill>
@@ -3648,14 +3744,14 @@
       </p:sp>
       <p:sp>
         <p:nvSpPr>
-          <p:cNvPr id="14" name="Rectangle 13"/>
+          <p:cNvPr id="16" name="Rectangle 15"/>
           <p:cNvSpPr/>
           <p:nvPr/>
         </p:nvSpPr>
         <p:spPr>
           <a:xfrm>
-            <a:off x="9400032" y="914400"/>
-            <a:ext cx="2243023" cy="1298448"/>
+            <a:off x="548640" y="6126480"/>
+            <a:ext cx="5120640" cy="640080"/>
           </a:xfrm>
           <a:prstGeom prst="rect">
             <a:avLst/>
@@ -3677,14 +3773,14 @@
       </p:sp>
       <p:sp>
         <p:nvSpPr>
-          <p:cNvPr id="15" name="TextBox 14"/>
+          <p:cNvPr id="17" name="TextBox 16"/>
           <p:cNvSpPr txBox="1"/>
           <p:nvPr/>
         </p:nvSpPr>
         <p:spPr>
           <a:xfrm>
-            <a:off x="9528048" y="969264"/>
-            <a:ext cx="1986991" cy="201168"/>
+            <a:off x="694944" y="6163056"/>
+            <a:ext cx="4828031" cy="566928"/>
           </a:xfrm>
           <a:prstGeom prst="rect">
             <a:avLst/>
@@ -3705,44 +3801,32 @@
                 <a:spcPts val="0"/>
               </a:spcBef>
               <a:spcAft>
-                <a:spcPts val="0"/>
+                <a:spcPts val="100"/>
               </a:spcAft>
             </a:pPr>
             <a:r>
               <a:rPr sz="950" b="1">
                 <a:solidFill>
-                  <a:srgbClr val="C0612C"/>
-                </a:solidFill>
-                <a:latin typeface="Microsoft YaHei"/>
-                <a:ea typeface="Microsoft YaHei"/>
-                <a:cs typeface="Microsoft YaHei"/>
-              </a:rPr>
-              <a:t>规划器的边界</a:t>
-            </a:r>
-          </a:p>
-        </p:txBody>
-      </p:sp>
-      <p:sp>
-        <p:nvSpPr>
-          <p:cNvPr id="16" name="TextBox 15"/>
-          <p:cNvSpPr txBox="1"/>
-          <p:nvPr/>
-        </p:nvSpPr>
-        <p:spPr>
-          <a:xfrm>
-            <a:off x="9528048" y="1188720"/>
-            <a:ext cx="1986991" cy="987551"/>
-          </a:xfrm>
-          <a:prstGeom prst="rect">
-            <a:avLst/>
-          </a:prstGeom>
-          <a:noFill/>
-        </p:spPr>
-        <p:txBody>
-          <a:bodyPr wrap="square" anchor="t" lIns="0" tIns="0" rIns="0" bIns="0">
-            <a:noAutofit/>
-          </a:bodyPr>
-          <a:lstStyle/>
+                  <a:srgbClr val="3F63A8"/>
+                </a:solidFill>
+                <a:latin typeface="Microsoft YaHei"/>
+                <a:ea typeface="Microsoft YaHei"/>
+                <a:cs typeface="Microsoft YaHei"/>
+              </a:rPr>
+              <a:t>0  入口</a:t>
+            </a:r>
+            <a:r>
+              <a:rPr sz="850" b="0">
+                <a:solidFill>
+                  <a:srgbClr val="66727F"/>
+                </a:solidFill>
+                <a:latin typeface="Microsoft YaHei"/>
+                <a:ea typeface="Microsoft YaHei"/>
+                <a:cs typeface="Microsoft YaHei"/>
+              </a:rPr>
+              <a:t>　进环之前只跑一次</a:t>
+            </a:r>
+          </a:p>
           <a:p>
             <a:pPr algn="l" latinLnBrk="0">
               <a:lnSpc>
@@ -3764,21 +3848,8 @@
                 <a:ea typeface="Microsoft YaHei"/>
                 <a:cs typeface="Microsoft YaHei"/>
               </a:rPr>
-              <a:t>planner-skills/</a:t>
-            </a:r>
-          </a:p>
-          <a:p>
-            <a:pPr algn="l" latinLnBrk="0">
-              <a:lnSpc>
-                <a:spcPct val="100000"/>
-              </a:lnSpc>
-              <a:spcBef>
-                <a:spcPts val="0"/>
-              </a:spcBef>
-              <a:spcAft>
-                <a:spcPts val="0"/>
-              </a:spcAft>
-            </a:pPr>
+              <a:t>memory_preflight</a:t>
+            </a:r>
             <a:r>
               <a:rPr sz="800" b="0">
                 <a:solidFill>
@@ -3788,31 +3859,40 @@
                 <a:ea typeface="Microsoft YaHei"/>
                 <a:cs typeface="Microsoft YaHei"/>
               </a:rPr>
-              <a:t>INDEX.md + 10 个 SKILL.md</a:t>
-            </a:r>
-          </a:p>
-          <a:p>
-            <a:pPr algn="l" latinLnBrk="0">
-              <a:lnSpc>
-                <a:spcPct val="100000"/>
-              </a:lnSpc>
-              <a:spcBef>
-                <a:spcPts val="0"/>
-              </a:spcBef>
-              <a:spcAft>
-                <a:spcPts val="0"/>
-              </a:spcAft>
-            </a:pPr>
+              <a:t>　显存预检</a:t>
+            </a:r>
             <a:r>
               <a:rPr sz="800" b="0">
                 <a:solidFill>
+                  <a:srgbClr val="C5CCD4"/>
+                </a:solidFill>
+                <a:latin typeface="Microsoft YaHei"/>
+                <a:ea typeface="Microsoft YaHei"/>
+                <a:cs typeface="Microsoft YaHei"/>
+              </a:rPr>
+              <a:t>　｜　</a:t>
+            </a:r>
+            <a:r>
+              <a:rPr sz="750" b="0">
+                <a:solidFill>
+                  <a:srgbClr val="35424F"/>
+                </a:solidFill>
+                <a:latin typeface="Consolas"/>
+                <a:ea typeface="Microsoft YaHei"/>
+                <a:cs typeface="Microsoft YaHei"/>
+              </a:rPr>
+              <a:t>server · evaluation · benchmark</a:t>
+            </a:r>
+            <a:r>
+              <a:rPr sz="800" b="0">
+                <a:solidFill>
                   <a:srgbClr val="66727F"/>
                 </a:solidFill>
                 <a:latin typeface="Microsoft YaHei"/>
                 <a:ea typeface="Microsoft YaHei"/>
                 <a:cs typeface="Microsoft YaHei"/>
               </a:rPr>
-              <a:t>默认只附 INDEX，一轮最多读 2 个</a:t>
+              <a:t>　起服务、测基线</a:t>
             </a:r>
           </a:p>
           <a:p>
@@ -3836,21 +3916,8 @@
                 <a:ea typeface="Microsoft YaHei"/>
                 <a:cs typeface="Microsoft YaHei"/>
               </a:rPr>
-              <a:t>probe · planner_diagnostics</a:t>
-            </a:r>
-          </a:p>
-          <a:p>
-            <a:pPr algn="l" latinLnBrk="0">
-              <a:lnSpc>
-                <a:spcPct val="100000"/>
-              </a:lnSpc>
-              <a:spcBef>
-                <a:spcPts val="0"/>
-              </a:spcBef>
-              <a:spcAft>
-                <a:spcPts val="0"/>
-              </a:spcAft>
-            </a:pPr>
+              <a:t>diagnostic_profiles</a:t>
+            </a:r>
             <a:r>
               <a:rPr sz="800" b="0">
                 <a:solidFill>
@@ -3860,93 +3927,54 @@
                 <a:ea typeface="Microsoft YaHei"/>
                 <a:cs typeface="Microsoft YaHei"/>
               </a:rPr>
-              <a:t>证据不足时的有界诊断，≤ 64 KiB</a:t>
-            </a:r>
-          </a:p>
-          <a:p>
-            <a:pPr algn="l" latinLnBrk="0">
-              <a:lnSpc>
-                <a:spcPct val="100000"/>
-              </a:lnSpc>
-              <a:spcBef>
-                <a:spcPts val="0"/>
-              </a:spcBef>
-              <a:spcAft>
-                <a:spcPts val="0"/>
-              </a:spcAft>
-            </a:pPr>
+              <a:t>　生成诊断映射</a:t>
+            </a:r>
             <a:r>
               <a:rPr sz="800" b="0">
                 <a:solidFill>
+                  <a:srgbClr val="C5CCD4"/>
+                </a:solidFill>
+                <a:latin typeface="Microsoft YaHei"/>
+                <a:ea typeface="Microsoft YaHei"/>
+                <a:cs typeface="Microsoft YaHei"/>
+              </a:rPr>
+              <a:t>　｜　</a:t>
+            </a:r>
+            <a:r>
+              <a:rPr sz="750" b="0">
+                <a:solidFill>
+                  <a:srgbClr val="35424F"/>
+                </a:solidFill>
+                <a:latin typeface="Consolas"/>
+                <a:ea typeface="Microsoft YaHei"/>
+                <a:cs typeface="Microsoft YaHei"/>
+              </a:rPr>
+              <a:t>optimization_source</a:t>
+            </a:r>
+            <a:r>
+              <a:rPr sz="800" b="0">
+                <a:solidFill>
                   <a:srgbClr val="66727F"/>
                 </a:solidFill>
                 <a:latin typeface="Microsoft YaHei"/>
                 <a:ea typeface="Microsoft YaHei"/>
                 <a:cs typeface="Microsoft YaHei"/>
               </a:rPr>
-              <a:t>本轮 5 个 probe，都改变了决策</a:t>
-            </a:r>
-          </a:p>
-          <a:p>
-            <a:pPr algn="l" latinLnBrk="0">
-              <a:lnSpc>
-                <a:spcPct val="100000"/>
-              </a:lnSpc>
-              <a:spcBef>
-                <a:spcPts val="0"/>
-              </a:spcBef>
-              <a:spcAft>
-                <a:spcPts val="0"/>
-              </a:spcAft>
-            </a:pPr>
-            <a:r>
-              <a:rPr sz="800" b="0">
-                <a:solidFill>
-                  <a:srgbClr val="B4382F"/>
-                </a:solidFill>
-                <a:latin typeface="Microsoft YaHei"/>
-                <a:ea typeface="Microsoft YaHei"/>
-                <a:cs typeface="Microsoft YaHei"/>
-              </a:rPr>
-              <a:t>依赖当前 Codex 会话托管，</a:t>
-            </a:r>
-          </a:p>
-          <a:p>
-            <a:pPr algn="l" latinLnBrk="0">
-              <a:lnSpc>
-                <a:spcPct val="100000"/>
-              </a:lnSpc>
-              <a:spcBef>
-                <a:spcPts val="0"/>
-              </a:spcBef>
-              <a:spcAft>
-                <a:spcPts val="0"/>
-              </a:spcAft>
-            </a:pPr>
-            <a:r>
-              <a:rPr sz="800" b="0">
-                <a:solidFill>
-                  <a:srgbClr val="B4382F"/>
-                </a:solidFill>
-                <a:latin typeface="Microsoft YaHei"/>
-                <a:ea typeface="Microsoft YaHei"/>
-                <a:cs typeface="Microsoft YaHei"/>
-              </a:rPr>
-              <a:t>还不能无人值守长跑</a:t>
-            </a:r>
-          </a:p>
-        </p:txBody>
-      </p:sp>
-      <p:sp>
-        <p:nvSpPr>
-          <p:cNvPr id="17" name="Rectangle 16"/>
+              <a:t>　导入已验证结果</a:t>
+            </a:r>
+          </a:p>
+        </p:txBody>
+      </p:sp>
+      <p:sp>
+        <p:nvSpPr>
+          <p:cNvPr id="18" name="Rectangle 17"/>
           <p:cNvSpPr/>
           <p:nvPr/>
         </p:nvSpPr>
         <p:spPr>
           <a:xfrm>
-            <a:off x="548640" y="5852160"/>
-            <a:ext cx="3429000" cy="841248"/>
+            <a:off x="5852159" y="6126480"/>
+            <a:ext cx="5790895" cy="640080"/>
           </a:xfrm>
           <a:prstGeom prst="rect">
             <a:avLst/>
@@ -3968,14 +3996,14 @@
       </p:sp>
       <p:sp>
         <p:nvSpPr>
-          <p:cNvPr id="18" name="TextBox 17"/>
+          <p:cNvPr id="19" name="TextBox 18"/>
           <p:cNvSpPr txBox="1"/>
           <p:nvPr/>
         </p:nvSpPr>
         <p:spPr>
           <a:xfrm>
-            <a:off x="676656" y="5907024"/>
-            <a:ext cx="3172968" cy="201168"/>
+            <a:off x="5998464" y="6163056"/>
+            <a:ext cx="5498287" cy="566928"/>
           </a:xfrm>
           <a:prstGeom prst="rect">
             <a:avLst/>
@@ -3996,44 +4024,21 @@
                 <a:spcPts val="0"/>
               </a:spcBef>
               <a:spcAft>
-                <a:spcPts val="0"/>
+                <a:spcPts val="100"/>
               </a:spcAft>
             </a:pPr>
             <a:r>
               <a:rPr sz="950" b="1">
                 <a:solidFill>
-                  <a:srgbClr val="3F63A8"/>
-                </a:solidFill>
-                <a:latin typeface="Microsoft YaHei"/>
-                <a:ea typeface="Microsoft YaHei"/>
-                <a:cs typeface="Microsoft YaHei"/>
-              </a:rPr>
-              <a:t>0  入口 · A 阶段，只跑一次</a:t>
-            </a:r>
-          </a:p>
-        </p:txBody>
-      </p:sp>
-      <p:sp>
-        <p:nvSpPr>
-          <p:cNvPr id="19" name="TextBox 18"/>
-          <p:cNvSpPr txBox="1"/>
-          <p:nvPr/>
-        </p:nvSpPr>
-        <p:spPr>
-          <a:xfrm>
-            <a:off x="676656" y="6126480"/>
-            <a:ext cx="3172968" cy="530352"/>
-          </a:xfrm>
-          <a:prstGeom prst="rect">
-            <a:avLst/>
-          </a:prstGeom>
-          <a:noFill/>
-        </p:spPr>
-        <p:txBody>
-          <a:bodyPr wrap="square" anchor="t" lIns="0" tIns="0" rIns="0" bIns="0">
-            <a:noAutofit/>
-          </a:bodyPr>
-          <a:lstStyle/>
+                  <a:srgbClr val="35424F"/>
+                </a:solidFill>
+                <a:latin typeface="Microsoft YaHei"/>
+                <a:ea typeface="Microsoft YaHei"/>
+                <a:cs typeface="Microsoft YaHei"/>
+              </a:rPr>
+              <a:t>被测系统</a:t>
+            </a:r>
+          </a:p>
           <a:p>
             <a:pPr algn="l" latinLnBrk="0">
               <a:lnSpc>
@@ -4055,7 +4060,7 @@
                 <a:ea typeface="Microsoft YaHei"/>
                 <a:cs typeface="Microsoft YaHei"/>
               </a:rPr>
-              <a:t>memory_preflight</a:t>
+              <a:t>SGLang 原仓库</a:t>
             </a:r>
             <a:r>
               <a:rPr sz="800" b="0">
@@ -4066,21 +4071,19 @@
                 <a:ea typeface="Microsoft YaHei"/>
                 <a:cs typeface="Microsoft YaHei"/>
               </a:rPr>
-              <a:t>　显存预检；控制器另查卡空闲、备份、SHA</a:t>
-            </a:r>
-          </a:p>
-          <a:p>
-            <a:pPr algn="l" latinLnBrk="0">
-              <a:lnSpc>
-                <a:spcPct val="100000"/>
-              </a:lnSpc>
-              <a:spcBef>
-                <a:spcPts val="0"/>
-              </a:spcBef>
-              <a:spcAft>
-                <a:spcPts val="0"/>
-              </a:spcAft>
-            </a:pPr>
+              <a:t>　原 Git 版本，未提交修改保留</a:t>
+            </a:r>
+            <a:r>
+              <a:rPr sz="800" b="0">
+                <a:solidFill>
+                  <a:srgbClr val="C5CCD4"/>
+                </a:solidFill>
+                <a:latin typeface="Microsoft YaHei"/>
+                <a:ea typeface="Microsoft YaHei"/>
+                <a:cs typeface="Microsoft YaHei"/>
+              </a:rPr>
+              <a:t>　｜　</a:t>
+            </a:r>
             <a:r>
               <a:rPr sz="750" b="0">
                 <a:solidFill>
@@ -4090,7 +4093,7 @@
                 <a:ea typeface="Microsoft YaHei"/>
                 <a:cs typeface="Microsoft YaHei"/>
               </a:rPr>
-              <a:t>server · evaluation · benchmark</a:t>
+              <a:t>xInfer / xtorch_ops</a:t>
             </a:r>
             <a:r>
               <a:rPr sz="800" b="0">
@@ -4101,21 +4104,19 @@
                 <a:ea typeface="Microsoft YaHei"/>
                 <a:cs typeface="Microsoft YaHei"/>
               </a:rPr>
-              <a:t>　冻结配置起服务、测基线</a:t>
-            </a:r>
-          </a:p>
-          <a:p>
-            <a:pPr algn="l" latinLnBrk="0">
-              <a:lnSpc>
-                <a:spcPct val="100000"/>
-              </a:lnSpc>
-              <a:spcBef>
-                <a:spcPts val="0"/>
-              </a:spcBef>
-              <a:spcAft>
-                <a:spcPts val="0"/>
-              </a:spcAft>
-            </a:pPr>
+              <a:t>　只编登记的 standalone 组件</a:t>
+            </a:r>
+            <a:r>
+              <a:rPr sz="800" b="0">
+                <a:solidFill>
+                  <a:srgbClr val="C5CCD4"/>
+                </a:solidFill>
+                <a:latin typeface="Microsoft YaHei"/>
+                <a:ea typeface="Microsoft YaHei"/>
+                <a:cs typeface="Microsoft YaHei"/>
+              </a:rPr>
+              <a:t>　｜　</a:t>
+            </a:r>
             <a:r>
               <a:rPr sz="750" b="0">
                 <a:solidFill>
@@ -4125,7 +4126,7 @@
                 <a:ea typeface="Microsoft YaHei"/>
                 <a:cs typeface="Microsoft YaHei"/>
               </a:rPr>
-              <a:t>diagnostic_profiles</a:t>
+              <a:t>M100 单卡</a:t>
             </a:r>
             <a:r>
               <a:rPr sz="800" b="0">
@@ -4136,7 +4137,7 @@
                 <a:ea typeface="Microsoft YaHei"/>
                 <a:cs typeface="Microsoft YaHei"/>
               </a:rPr>
-              <a:t>　任何候选执行前生成诊断映射</a:t>
+              <a:t>　目标模型与精度由任务契约锁定</a:t>
             </a:r>
           </a:p>
           <a:p>
@@ -4154,24 +4155,13 @@
             <a:r>
               <a:rPr sz="750" b="0">
                 <a:solidFill>
-                  <a:srgbClr val="35424F"/>
-                </a:solidFill>
-                <a:latin typeface="Consolas"/>
-                <a:ea typeface="Microsoft YaHei"/>
-                <a:cs typeface="Microsoft YaHei"/>
-              </a:rPr>
-              <a:t>optimization_source</a:t>
-            </a:r>
-            <a:r>
-              <a:rPr sz="800" b="0">
-                <a:solidFill>
                   <a:srgbClr val="66727F"/>
                 </a:solidFill>
                 <a:latin typeface="Microsoft YaHei"/>
                 <a:ea typeface="Microsoft YaHei"/>
                 <a:cs typeface="Microsoft YaHei"/>
               </a:rPr>
-              <a:t>　导入已完整验证的结果</a:t>
+              <a:t>算子层的跨层调用尚未接入：融合算子由规划器直接写成内联补丁，不经 xpugen</a:t>
             </a:r>
           </a:p>
         </p:txBody>
@@ -4183,359 +4173,13 @@
           <p:nvPr/>
         </p:nvCxnSpPr>
         <p:spPr>
-          <a:xfrm flipV="1">
-            <a:off x="841247" y="4270248"/>
-            <a:ext cx="0" cy="1581912"/>
+          <a:xfrm>
+            <a:off x="2926080" y="1892808"/>
+            <a:ext cx="411480" cy="0"/>
           </a:xfrm>
           <a:prstGeom prst="line">
             <a:avLst/>
           </a:prstGeom>
-          <a:ln w="15875">
-            <a:solidFill>
-              <a:srgbClr val="3F63A8"/>
-            </a:solidFill>
-            <a:tailEnd type="triangle" w="med" len="med"/>
-          </a:ln>
-        </p:spPr>
-      </p:cxnSp>
-      <p:sp>
-        <p:nvSpPr>
-          <p:cNvPr id="21" name="Rectangle 20"/>
-          <p:cNvSpPr/>
-          <p:nvPr/>
-        </p:nvSpPr>
-        <p:spPr>
-          <a:xfrm>
-            <a:off x="9400032" y="5376672"/>
-            <a:ext cx="2243023" cy="1316736"/>
-          </a:xfrm>
-          <a:prstGeom prst="rect">
-            <a:avLst/>
-          </a:prstGeom>
-          <a:solidFill>
-            <a:srgbClr val="F6F7F9"/>
-          </a:solidFill>
-          <a:ln>
-            <a:noFill/>
-          </a:ln>
-        </p:spPr>
-        <p:txBody>
-          <a:bodyPr rtlCol="0" anchor="ctr"/>
-          <a:lstStyle/>
-          <a:p>
-            <a:pPr algn="ctr"/>
-          </a:p>
-        </p:txBody>
-      </p:sp>
-      <p:sp>
-        <p:nvSpPr>
-          <p:cNvPr id="22" name="TextBox 21"/>
-          <p:cNvSpPr txBox="1"/>
-          <p:nvPr/>
-        </p:nvSpPr>
-        <p:spPr>
-          <a:xfrm>
-            <a:off x="9528048" y="5431536"/>
-            <a:ext cx="1986991" cy="201168"/>
-          </a:xfrm>
-          <a:prstGeom prst="rect">
-            <a:avLst/>
-          </a:prstGeom>
-          <a:noFill/>
-        </p:spPr>
-        <p:txBody>
-          <a:bodyPr wrap="square" anchor="ctr" lIns="0" tIns="0" rIns="0" bIns="0">
-            <a:noAutofit/>
-          </a:bodyPr>
-          <a:lstStyle/>
-          <a:p>
-            <a:pPr algn="l" latinLnBrk="0">
-              <a:lnSpc>
-                <a:spcPct val="100000"/>
-              </a:lnSpc>
-              <a:spcBef>
-                <a:spcPts val="0"/>
-              </a:spcBef>
-              <a:spcAft>
-                <a:spcPts val="0"/>
-              </a:spcAft>
-            </a:pPr>
-            <a:r>
-              <a:rPr sz="950" b="1">
-                <a:solidFill>
-                  <a:srgbClr val="35424F"/>
-                </a:solidFill>
-                <a:latin typeface="Microsoft YaHei"/>
-                <a:ea typeface="Microsoft YaHei"/>
-                <a:cs typeface="Microsoft YaHei"/>
-              </a:rPr>
-              <a:t>被测系统</a:t>
-            </a:r>
-          </a:p>
-        </p:txBody>
-      </p:sp>
-      <p:sp>
-        <p:nvSpPr>
-          <p:cNvPr id="23" name="TextBox 22"/>
-          <p:cNvSpPr txBox="1"/>
-          <p:nvPr/>
-        </p:nvSpPr>
-        <p:spPr>
-          <a:xfrm>
-            <a:off x="9528048" y="5650992"/>
-            <a:ext cx="1986991" cy="1005839"/>
-          </a:xfrm>
-          <a:prstGeom prst="rect">
-            <a:avLst/>
-          </a:prstGeom>
-          <a:noFill/>
-        </p:spPr>
-        <p:txBody>
-          <a:bodyPr wrap="square" anchor="t" lIns="0" tIns="0" rIns="0" bIns="0">
-            <a:noAutofit/>
-          </a:bodyPr>
-          <a:lstStyle/>
-          <a:p>
-            <a:pPr algn="l" latinLnBrk="0">
-              <a:lnSpc>
-                <a:spcPct val="100000"/>
-              </a:lnSpc>
-              <a:spcBef>
-                <a:spcPts val="0"/>
-              </a:spcBef>
-              <a:spcAft>
-                <a:spcPts val="0"/>
-              </a:spcAft>
-            </a:pPr>
-            <a:r>
-              <a:rPr sz="850" b="1">
-                <a:solidFill>
-                  <a:srgbClr val="16202A"/>
-                </a:solidFill>
-                <a:latin typeface="Microsoft YaHei"/>
-                <a:ea typeface="Microsoft YaHei"/>
-                <a:cs typeface="Microsoft YaHei"/>
-              </a:rPr>
-              <a:t>SGLang 原仓库</a:t>
-            </a:r>
-          </a:p>
-          <a:p>
-            <a:pPr algn="l" latinLnBrk="0">
-              <a:lnSpc>
-                <a:spcPct val="100000"/>
-              </a:lnSpc>
-              <a:spcBef>
-                <a:spcPts val="0"/>
-              </a:spcBef>
-              <a:spcAft>
-                <a:spcPts val="0"/>
-              </a:spcAft>
-            </a:pPr>
-            <a:r>
-              <a:rPr sz="800" b="0">
-                <a:solidFill>
-                  <a:srgbClr val="66727F"/>
-                </a:solidFill>
-                <a:latin typeface="Microsoft YaHei"/>
-                <a:ea typeface="Microsoft YaHei"/>
-                <a:cs typeface="Microsoft YaHei"/>
-              </a:rPr>
-              <a:t>原 Git 版本，未提交修改保留</a:t>
-            </a:r>
-          </a:p>
-          <a:p>
-            <a:pPr algn="l" latinLnBrk="0">
-              <a:lnSpc>
-                <a:spcPct val="100000"/>
-              </a:lnSpc>
-              <a:spcBef>
-                <a:spcPts val="0"/>
-              </a:spcBef>
-              <a:spcAft>
-                <a:spcPts val="0"/>
-              </a:spcAft>
-            </a:pPr>
-            <a:r>
-              <a:rPr sz="850" b="1">
-                <a:solidFill>
-                  <a:srgbClr val="16202A"/>
-                </a:solidFill>
-                <a:latin typeface="Microsoft YaHei"/>
-                <a:ea typeface="Microsoft YaHei"/>
-                <a:cs typeface="Microsoft YaHei"/>
-              </a:rPr>
-              <a:t>xInfer / xtorch_ops</a:t>
-            </a:r>
-          </a:p>
-          <a:p>
-            <a:pPr algn="l" latinLnBrk="0">
-              <a:lnSpc>
-                <a:spcPct val="100000"/>
-              </a:lnSpc>
-              <a:spcBef>
-                <a:spcPts val="0"/>
-              </a:spcBef>
-              <a:spcAft>
-                <a:spcPts val="0"/>
-              </a:spcAft>
-            </a:pPr>
-            <a:r>
-              <a:rPr sz="800" b="0">
-                <a:solidFill>
-                  <a:srgbClr val="66727F"/>
-                </a:solidFill>
-                <a:latin typeface="Microsoft YaHei"/>
-                <a:ea typeface="Microsoft YaHei"/>
-                <a:cs typeface="Microsoft YaHei"/>
-              </a:rPr>
-              <a:t>只编登记的 standalone 组件</a:t>
-            </a:r>
-          </a:p>
-          <a:p>
-            <a:pPr algn="l" latinLnBrk="0">
-              <a:lnSpc>
-                <a:spcPct val="100000"/>
-              </a:lnSpc>
-              <a:spcBef>
-                <a:spcPts val="0"/>
-              </a:spcBef>
-              <a:spcAft>
-                <a:spcPts val="0"/>
-              </a:spcAft>
-            </a:pPr>
-            <a:r>
-              <a:rPr sz="850" b="1">
-                <a:solidFill>
-                  <a:srgbClr val="16202A"/>
-                </a:solidFill>
-                <a:latin typeface="Microsoft YaHei"/>
-                <a:ea typeface="Microsoft YaHei"/>
-                <a:cs typeface="Microsoft YaHei"/>
-              </a:rPr>
-              <a:t>M100 单卡</a:t>
-            </a:r>
-          </a:p>
-          <a:p>
-            <a:pPr algn="l" latinLnBrk="0">
-              <a:lnSpc>
-                <a:spcPct val="100000"/>
-              </a:lnSpc>
-              <a:spcBef>
-                <a:spcPts val="0"/>
-              </a:spcBef>
-              <a:spcAft>
-                <a:spcPts val="0"/>
-              </a:spcAft>
-            </a:pPr>
-            <a:r>
-              <a:rPr sz="750" b="0">
-                <a:solidFill>
-                  <a:srgbClr val="66727F"/>
-                </a:solidFill>
-                <a:latin typeface="Consolas"/>
-                <a:ea typeface="Microsoft YaHei"/>
-                <a:cs typeface="Microsoft YaHei"/>
-              </a:rPr>
-              <a:t>Qwen3-VL-30B-A3B · channel-fp8</a:t>
-            </a:r>
-          </a:p>
-          <a:p>
-            <a:pPr algn="l" latinLnBrk="0">
-              <a:lnSpc>
-                <a:spcPct val="100000"/>
-              </a:lnSpc>
-              <a:spcBef>
-                <a:spcPts val="300"/>
-              </a:spcBef>
-              <a:spcAft>
-                <a:spcPts val="0"/>
-              </a:spcAft>
-            </a:pPr>
-            <a:r>
-              <a:rPr sz="750" b="0">
-                <a:solidFill>
-                  <a:srgbClr val="8C96A1"/>
-                </a:solidFill>
-                <a:latin typeface="Microsoft YaHei"/>
-                <a:ea typeface="Microsoft YaHei"/>
-                <a:cs typeface="Microsoft YaHei"/>
-              </a:rPr>
-              <a:t>native kernel 由 subagent 写，</a:t>
-            </a:r>
-          </a:p>
-          <a:p>
-            <a:pPr algn="l" latinLnBrk="0">
-              <a:lnSpc>
-                <a:spcPct val="100000"/>
-              </a:lnSpc>
-              <a:spcBef>
-                <a:spcPts val="0"/>
-              </a:spcBef>
-              <a:spcAft>
-                <a:spcPts val="0"/>
-              </a:spcAft>
-            </a:pPr>
-            <a:r>
-              <a:rPr sz="750" b="0">
-                <a:solidFill>
-                  <a:srgbClr val="8C96A1"/>
-                </a:solidFill>
-                <a:latin typeface="Microsoft YaHei"/>
-                <a:ea typeface="Microsoft YaHei"/>
-                <a:cs typeface="Microsoft YaHei"/>
-              </a:rPr>
-              <a:t>不是 xpugen 生成</a:t>
-            </a:r>
-          </a:p>
-        </p:txBody>
-      </p:sp>
-      <p:sp>
-        <p:nvSpPr>
-          <p:cNvPr id="24" name="Oval 23"/>
-          <p:cNvSpPr/>
-          <p:nvPr/>
-        </p:nvSpPr>
-        <p:spPr>
-          <a:xfrm>
-            <a:off x="1707184" y="1600200"/>
-            <a:ext cx="8778240" cy="4389120"/>
-          </a:xfrm>
-          <a:prstGeom prst="ellipse">
-            <a:avLst/>
-          </a:prstGeom>
-          <a:noFill/>
-          <a:ln w="127000">
-            <a:solidFill>
-              <a:srgbClr val="EEF1F4"/>
-            </a:solidFill>
-          </a:ln>
-        </p:spPr>
-        <p:txBody>
-          <a:bodyPr rtlCol="0" anchor="ctr"/>
-          <a:lstStyle/>
-          <a:p>
-            <a:pPr algn="ctr"/>
-          </a:p>
-        </p:txBody>
-      </p:sp>
-      <p:sp>
-        <p:nvSpPr>
-          <p:cNvPr id="25" name="Arc 24"/>
-          <p:cNvSpPr/>
-          <p:nvPr/>
-        </p:nvSpPr>
-        <p:spPr>
-          <a:xfrm>
-            <a:off x="1707184" y="1600200"/>
-            <a:ext cx="8778240" cy="4389120"/>
-          </a:xfrm>
-          <a:prstGeom prst="arc">
-            <a:avLst>
-              <a:gd name="adj1" fmla="val 11221267"/>
-              <a:gd name="adj2" fmla="val 11577168"/>
-            </a:avLst>
-          </a:prstGeom>
-          <a:noFill/>
           <a:ln w="19050">
             <a:solidFill>
               <a:srgbClr val="66727F"/>
@@ -4543,32 +4187,21 @@
             <a:tailEnd type="triangle" w="med" len="med"/>
           </a:ln>
         </p:spPr>
-        <p:txBody>
-          <a:bodyPr rtlCol="0" anchor="ctr"/>
-          <a:lstStyle/>
-          <a:p>
-            <a:pPr algn="ctr"/>
-          </a:p>
-        </p:txBody>
-      </p:sp>
-      <p:sp>
-        <p:nvSpPr>
-          <p:cNvPr id="26" name="Arc 25"/>
-          <p:cNvSpPr/>
+      </p:cxnSp>
+      <p:cxnSp>
+        <p:nvCxnSpPr>
+          <p:cNvPr id="21" name="Connector 20"/>
+          <p:cNvCxnSpPr/>
           <p:nvPr/>
-        </p:nvSpPr>
-        <p:spPr>
-          <a:xfrm>
-            <a:off x="1707184" y="1600200"/>
-            <a:ext cx="8778240" cy="4389120"/>
-          </a:xfrm>
-          <a:prstGeom prst="arc">
-            <a:avLst>
-              <a:gd name="adj1" fmla="val 13329414"/>
-              <a:gd name="adj2" fmla="val 13675211"/>
-            </a:avLst>
+        </p:nvCxnSpPr>
+        <p:spPr>
+          <a:xfrm>
+            <a:off x="5715000" y="1892808"/>
+            <a:ext cx="411480" cy="0"/>
+          </a:xfrm>
+          <a:prstGeom prst="line">
+            <a:avLst/>
           </a:prstGeom>
-          <a:noFill/>
           <a:ln w="19050">
             <a:solidFill>
               <a:srgbClr val="66727F"/>
@@ -4576,32 +4209,21 @@
             <a:tailEnd type="triangle" w="med" len="med"/>
           </a:ln>
         </p:spPr>
-        <p:txBody>
-          <a:bodyPr rtlCol="0" anchor="ctr"/>
-          <a:lstStyle/>
-          <a:p>
-            <a:pPr algn="ctr"/>
-          </a:p>
-        </p:txBody>
-      </p:sp>
-      <p:sp>
-        <p:nvSpPr>
-          <p:cNvPr id="27" name="Arc 26"/>
-          <p:cNvSpPr/>
+      </p:cxnSp>
+      <p:cxnSp>
+        <p:nvCxnSpPr>
+          <p:cNvPr id="22" name="Connector 21"/>
+          <p:cNvCxnSpPr/>
           <p:nvPr/>
-        </p:nvSpPr>
-        <p:spPr>
-          <a:xfrm>
-            <a:off x="1707184" y="1600200"/>
-            <a:ext cx="8778240" cy="4389120"/>
-          </a:xfrm>
-          <a:prstGeom prst="arc">
-            <a:avLst>
-              <a:gd name="adj1" fmla="val 17093074"/>
-              <a:gd name="adj2" fmla="val 17522061"/>
-            </a:avLst>
+        </p:nvCxnSpPr>
+        <p:spPr>
+          <a:xfrm>
+            <a:off x="8503920" y="1892808"/>
+            <a:ext cx="274320" cy="0"/>
+          </a:xfrm>
+          <a:prstGeom prst="line">
+            <a:avLst/>
           </a:prstGeom>
-          <a:noFill/>
           <a:ln w="19050">
             <a:solidFill>
               <a:srgbClr val="66727F"/>
@@ -4609,66 +4231,21 @@
             <a:tailEnd type="triangle" w="med" len="med"/>
           </a:ln>
         </p:spPr>
-        <p:txBody>
-          <a:bodyPr rtlCol="0" anchor="ctr"/>
-          <a:lstStyle/>
-          <a:p>
-            <a:pPr algn="ctr"/>
-          </a:p>
-        </p:txBody>
-      </p:sp>
-      <p:sp>
-        <p:nvSpPr>
-          <p:cNvPr id="28" name="Arc 27"/>
-          <p:cNvSpPr/>
+      </p:cxnSp>
+      <p:cxnSp>
+        <p:nvCxnSpPr>
+          <p:cNvPr id="23" name="Connector 22"/>
+          <p:cNvCxnSpPr/>
           <p:nvPr/>
-        </p:nvSpPr>
-        <p:spPr>
-          <a:xfrm>
-            <a:off x="1707184" y="1600200"/>
-            <a:ext cx="8778240" cy="4389120"/>
-          </a:xfrm>
-          <a:prstGeom prst="arc">
-            <a:avLst>
-              <a:gd name="adj1" fmla="val 20136706"/>
-              <a:gd name="adj2" fmla="val 20556111"/>
-            </a:avLst>
+        </p:nvCxnSpPr>
+        <p:spPr>
+          <a:xfrm>
+            <a:off x="10210647" y="4078224"/>
+            <a:ext cx="0" cy="1005840"/>
+          </a:xfrm>
+          <a:prstGeom prst="line">
+            <a:avLst/>
           </a:prstGeom>
-          <a:noFill/>
-          <a:ln w="19050">
-            <a:solidFill>
-              <a:srgbClr val="66727F"/>
-            </a:solidFill>
-            <a:headEnd type="triangle" w="med" len="med"/>
-            <a:tailEnd type="triangle" w="med" len="med"/>
-          </a:ln>
-        </p:spPr>
-        <p:txBody>
-          <a:bodyPr rtlCol="0" anchor="ctr"/>
-          <a:lstStyle/>
-          <a:p>
-            <a:pPr algn="ctr"/>
-          </a:p>
-        </p:txBody>
-      </p:sp>
-      <p:sp>
-        <p:nvSpPr>
-          <p:cNvPr id="29" name="Arc 28"/>
-          <p:cNvSpPr/>
-          <p:nvPr/>
-        </p:nvSpPr>
-        <p:spPr>
-          <a:xfrm>
-            <a:off x="1707184" y="1600200"/>
-            <a:ext cx="8778240" cy="4389120"/>
-          </a:xfrm>
-          <a:prstGeom prst="arc">
-            <a:avLst>
-              <a:gd name="adj1" fmla="val 21505578"/>
-              <a:gd name="adj2" fmla="val 94421"/>
-            </a:avLst>
-          </a:prstGeom>
-          <a:noFill/>
           <a:ln w="19050">
             <a:solidFill>
               <a:srgbClr val="66727F"/>
@@ -4676,32 +4253,21 @@
             <a:tailEnd type="triangle" w="med" len="med"/>
           </a:ln>
         </p:spPr>
-        <p:txBody>
-          <a:bodyPr rtlCol="0" anchor="ctr"/>
-          <a:lstStyle/>
-          <a:p>
-            <a:pPr algn="ctr"/>
-          </a:p>
-        </p:txBody>
-      </p:sp>
-      <p:sp>
-        <p:nvSpPr>
-          <p:cNvPr id="30" name="Arc 29"/>
-          <p:cNvSpPr/>
+      </p:cxnSp>
+      <p:cxnSp>
+        <p:nvCxnSpPr>
+          <p:cNvPr id="24" name="Connector 23"/>
+          <p:cNvCxnSpPr/>
           <p:nvPr/>
-        </p:nvSpPr>
-        <p:spPr>
-          <a:xfrm>
-            <a:off x="1707184" y="1600200"/>
-            <a:ext cx="8778240" cy="4389120"/>
-          </a:xfrm>
-          <a:prstGeom prst="arc">
-            <a:avLst>
-              <a:gd name="adj1" fmla="val 1043888"/>
-              <a:gd name="adj2" fmla="val 1463293"/>
-            </a:avLst>
+        </p:nvCxnSpPr>
+        <p:spPr>
+          <a:xfrm flipH="1">
+            <a:off x="8366760" y="5532120"/>
+            <a:ext cx="411480" cy="0"/>
+          </a:xfrm>
+          <a:prstGeom prst="line">
+            <a:avLst/>
           </a:prstGeom>
-          <a:noFill/>
           <a:ln w="19050">
             <a:solidFill>
               <a:srgbClr val="66727F"/>
@@ -4709,32 +4275,21 @@
             <a:tailEnd type="triangle" w="med" len="med"/>
           </a:ln>
         </p:spPr>
-        <p:txBody>
-          <a:bodyPr rtlCol="0" anchor="ctr"/>
-          <a:lstStyle/>
-          <a:p>
-            <a:pPr algn="ctr"/>
-          </a:p>
-        </p:txBody>
-      </p:sp>
-      <p:sp>
-        <p:nvSpPr>
-          <p:cNvPr id="31" name="Arc 30"/>
-          <p:cNvSpPr/>
+      </p:cxnSp>
+      <p:cxnSp>
+        <p:nvCxnSpPr>
+          <p:cNvPr id="25" name="Connector 24"/>
+          <p:cNvCxnSpPr/>
           <p:nvPr/>
-        </p:nvSpPr>
-        <p:spPr>
-          <a:xfrm>
-            <a:off x="1707184" y="1600200"/>
-            <a:ext cx="8778240" cy="4389120"/>
-          </a:xfrm>
-          <a:prstGeom prst="arc">
-            <a:avLst>
-              <a:gd name="adj1" fmla="val 4077938"/>
-              <a:gd name="adj2" fmla="val 4506925"/>
-            </a:avLst>
+        </p:nvCxnSpPr>
+        <p:spPr>
+          <a:xfrm flipH="1">
+            <a:off x="5577840" y="5532120"/>
+            <a:ext cx="411480" cy="0"/>
+          </a:xfrm>
+          <a:prstGeom prst="line">
+            <a:avLst/>
           </a:prstGeom>
-          <a:noFill/>
           <a:ln w="19050">
             <a:solidFill>
               <a:srgbClr val="66727F"/>
@@ -4742,32 +4297,21 @@
             <a:tailEnd type="triangle" w="med" len="med"/>
           </a:ln>
         </p:spPr>
-        <p:txBody>
-          <a:bodyPr rtlCol="0" anchor="ctr"/>
-          <a:lstStyle/>
-          <a:p>
-            <a:pPr algn="ctr"/>
-          </a:p>
-        </p:txBody>
-      </p:sp>
-      <p:sp>
-        <p:nvSpPr>
-          <p:cNvPr id="32" name="Arc 31"/>
-          <p:cNvSpPr/>
+      </p:cxnSp>
+      <p:cxnSp>
+        <p:nvCxnSpPr>
+          <p:cNvPr id="26" name="Connector 25"/>
+          <p:cNvCxnSpPr/>
           <p:nvPr/>
-        </p:nvSpPr>
-        <p:spPr>
-          <a:xfrm>
-            <a:off x="1707184" y="1600200"/>
-            <a:ext cx="8778240" cy="4389120"/>
-          </a:xfrm>
-          <a:prstGeom prst="arc">
-            <a:avLst>
-              <a:gd name="adj1" fmla="val 7924788"/>
-              <a:gd name="adj2" fmla="val 8270585"/>
-            </a:avLst>
+        </p:nvCxnSpPr>
+        <p:spPr>
+          <a:xfrm flipH="1">
+            <a:off x="2926080" y="5532120"/>
+            <a:ext cx="274320" cy="0"/>
+          </a:xfrm>
+          <a:prstGeom prst="line">
+            <a:avLst/>
           </a:prstGeom>
-          <a:noFill/>
           <a:ln w="19050">
             <a:solidFill>
               <a:srgbClr val="66727F"/>
@@ -4775,32 +4319,21 @@
             <a:tailEnd type="triangle" w="med" len="med"/>
           </a:ln>
         </p:spPr>
-        <p:txBody>
-          <a:bodyPr rtlCol="0" anchor="ctr"/>
-          <a:lstStyle/>
-          <a:p>
-            <a:pPr algn="ctr"/>
-          </a:p>
-        </p:txBody>
-      </p:sp>
-      <p:sp>
-        <p:nvSpPr>
-          <p:cNvPr id="33" name="Arc 32"/>
-          <p:cNvSpPr/>
+      </p:cxnSp>
+      <p:cxnSp>
+        <p:nvCxnSpPr>
+          <p:cNvPr id="27" name="Connector 26"/>
+          <p:cNvCxnSpPr/>
           <p:nvPr/>
-        </p:nvSpPr>
-        <p:spPr>
-          <a:xfrm>
-            <a:off x="1707184" y="1600200"/>
-            <a:ext cx="8778240" cy="4389120"/>
-          </a:xfrm>
-          <a:prstGeom prst="arc">
-            <a:avLst>
-              <a:gd name="adj1" fmla="val 10022831"/>
-              <a:gd name="adj2" fmla="val 10378732"/>
-            </a:avLst>
+        </p:nvCxnSpPr>
+        <p:spPr>
+          <a:xfrm flipV="1">
+            <a:off x="1737360" y="2340864"/>
+            <a:ext cx="0" cy="2743200"/>
+          </a:xfrm>
+          <a:prstGeom prst="line">
+            <a:avLst/>
           </a:prstGeom>
-          <a:noFill/>
           <a:ln w="19050">
             <a:solidFill>
               <a:srgbClr val="66727F"/>
@@ -4808,24 +4341,17 @@
             <a:tailEnd type="triangle" w="med" len="med"/>
           </a:ln>
         </p:spPr>
-        <p:txBody>
-          <a:bodyPr rtlCol="0" anchor="ctr"/>
-          <a:lstStyle/>
-          <a:p>
-            <a:pPr algn="ctr"/>
-          </a:p>
-        </p:txBody>
-      </p:sp>
-      <p:sp>
-        <p:nvSpPr>
-          <p:cNvPr id="34" name="Rectangle 33"/>
+      </p:cxnSp>
+      <p:sp>
+        <p:nvSpPr>
+          <p:cNvPr id="28" name="Rectangle 27"/>
           <p:cNvSpPr/>
           <p:nvPr/>
         </p:nvSpPr>
         <p:spPr>
           <a:xfrm>
-            <a:off x="564184" y="3319272"/>
-            <a:ext cx="2286000" cy="950976"/>
+            <a:off x="548640" y="1444752"/>
+            <a:ext cx="2377440" cy="896112"/>
           </a:xfrm>
           <a:prstGeom prst="rect">
             <a:avLst/>
@@ -4849,14 +4375,14 @@
       </p:sp>
       <p:sp>
         <p:nvSpPr>
-          <p:cNvPr id="35" name="Rectangle 34"/>
+          <p:cNvPr id="29" name="Rectangle 28"/>
           <p:cNvSpPr/>
           <p:nvPr/>
         </p:nvSpPr>
         <p:spPr>
           <a:xfrm>
-            <a:off x="564184" y="3319272"/>
-            <a:ext cx="54864" cy="950976"/>
+            <a:off x="548640" y="1444752"/>
+            <a:ext cx="54864" cy="896112"/>
           </a:xfrm>
           <a:prstGeom prst="rect">
             <a:avLst/>
@@ -4878,14 +4404,14 @@
       </p:sp>
       <p:sp>
         <p:nvSpPr>
-          <p:cNvPr id="36" name="TextBox 35"/>
+          <p:cNvPr id="30" name="TextBox 29"/>
           <p:cNvSpPr txBox="1"/>
           <p:nvPr/>
         </p:nvSpPr>
         <p:spPr>
           <a:xfrm>
-            <a:off x="710488" y="3355848"/>
-            <a:ext cx="2048256" cy="877824"/>
+            <a:off x="694944" y="1481328"/>
+            <a:ext cx="2139696" cy="822960"/>
           </a:xfrm>
           <a:prstGeom prst="rect">
             <a:avLst/>
@@ -5025,56 +4551,45 @@
                 <a:ea typeface="Microsoft YaHei"/>
                 <a:cs typeface="Microsoft YaHei"/>
               </a:rPr>
-              <a:t>start / stop_profile 夹固定诊断请求</a:t>
-            </a:r>
-          </a:p>
-          <a:p>
-            <a:pPr algn="l" latinLnBrk="0">
-              <a:lnSpc>
-                <a:spcPct val="100000"/>
-              </a:lnSpc>
-              <a:spcBef>
-                <a:spcPts val="0"/>
-              </a:spcBef>
-              <a:spcAft>
-                <a:spcPts val="0"/>
-              </a:spcAft>
-            </a:pPr>
-            <a:r>
-              <a:rPr sz="850" b="1">
-                <a:solidFill>
-                  <a:srgbClr val="1E8A6E"/>
-                </a:solidFill>
-                <a:latin typeface="Microsoft YaHei"/>
-                <a:ea typeface="Microsoft YaHei"/>
-                <a:cs typeface="Microsoft YaHei"/>
-              </a:rPr>
-              <a:t>本轮 </a:t>
-            </a:r>
+              <a:t>start / stop_profile 圈定固定诊断请求</a:t>
+            </a:r>
+          </a:p>
+          <a:p>
+            <a:pPr algn="l" latinLnBrk="0">
+              <a:lnSpc>
+                <a:spcPct val="100000"/>
+              </a:lnSpc>
+              <a:spcBef>
+                <a:spcPts val="0"/>
+              </a:spcBef>
+              <a:spcAft>
+                <a:spcPts val="0"/>
+              </a:spcAft>
+            </a:pPr>
             <a:r>
               <a:rPr sz="850" b="0">
                 <a:solidFill>
-                  <a:srgbClr val="16202A"/>
-                </a:solidFill>
-                <a:latin typeface="Microsoft YaHei"/>
-                <a:ea typeface="Microsoft YaHei"/>
-                <a:cs typeface="Microsoft YaHei"/>
-              </a:rPr>
-              <a:t>profile 0 → 8，每轮 D 后重采</a:t>
-            </a:r>
-          </a:p>
-        </p:txBody>
-      </p:sp>
-      <p:sp>
-        <p:nvSpPr>
-          <p:cNvPr id="37" name="Rectangle 36"/>
+                  <a:srgbClr val="35424F"/>
+                </a:solidFill>
+                <a:latin typeface="Microsoft YaHei"/>
+                <a:ea typeface="Microsoft YaHei"/>
+                <a:cs typeface="Microsoft YaHei"/>
+              </a:rPr>
+              <a:t>诊断数据不计入收益口径</a:t>
+            </a:r>
+          </a:p>
+        </p:txBody>
+      </p:sp>
+      <p:sp>
+        <p:nvSpPr>
+          <p:cNvPr id="31" name="Rectangle 30"/>
           <p:cNvSpPr/>
           <p:nvPr/>
         </p:nvSpPr>
         <p:spPr>
           <a:xfrm>
-            <a:off x="1640793" y="1879511"/>
-            <a:ext cx="2286000" cy="950976"/>
+            <a:off x="3337560" y="1444752"/>
+            <a:ext cx="2377440" cy="896112"/>
           </a:xfrm>
           <a:prstGeom prst="rect">
             <a:avLst/>
@@ -5098,14 +4613,14 @@
       </p:sp>
       <p:sp>
         <p:nvSpPr>
-          <p:cNvPr id="38" name="Rectangle 37"/>
+          <p:cNvPr id="32" name="Rectangle 31"/>
           <p:cNvSpPr/>
           <p:nvPr/>
         </p:nvSpPr>
         <p:spPr>
           <a:xfrm>
-            <a:off x="1640793" y="1879511"/>
-            <a:ext cx="54864" cy="950976"/>
+            <a:off x="3337560" y="1444752"/>
+            <a:ext cx="54864" cy="896112"/>
           </a:xfrm>
           <a:prstGeom prst="rect">
             <a:avLst/>
@@ -5127,14 +4642,14 @@
       </p:sp>
       <p:sp>
         <p:nvSpPr>
-          <p:cNvPr id="39" name="TextBox 38"/>
+          <p:cNvPr id="33" name="TextBox 32"/>
           <p:cNvSpPr txBox="1"/>
           <p:nvPr/>
         </p:nvSpPr>
         <p:spPr>
           <a:xfrm>
-            <a:off x="1787097" y="1916087"/>
-            <a:ext cx="2048256" cy="877824"/>
+            <a:off x="3483864" y="1481328"/>
+            <a:ext cx="2139696" cy="822960"/>
           </a:xfrm>
           <a:prstGeom prst="rect">
             <a:avLst/>
@@ -5266,40 +4781,29 @@
               </a:spcAft>
             </a:pPr>
             <a:r>
-              <a:rPr sz="850" b="1">
-                <a:solidFill>
-                  <a:srgbClr val="1E8A6E"/>
-                </a:solidFill>
-                <a:latin typeface="Microsoft YaHei"/>
-                <a:ea typeface="Microsoft YaHei"/>
-                <a:cs typeface="Microsoft YaHei"/>
-              </a:rPr>
-              <a:t>本轮 </a:t>
-            </a:r>
-            <a:r>
               <a:rPr sz="850" b="0">
                 <a:solidFill>
-                  <a:srgbClr val="16202A"/>
-                </a:solidFill>
-                <a:latin typeface="Microsoft YaHei"/>
-                <a:ea typeface="Microsoft YaHei"/>
-                <a:cs typeface="Microsoft YaHei"/>
-              </a:rPr>
-              <a:t>总和 23.921 ≈ 并集 23.920 ms</a:t>
-            </a:r>
-          </a:p>
-        </p:txBody>
-      </p:sp>
-      <p:sp>
-        <p:nvSpPr>
-          <p:cNvPr id="40" name="Rectangle 39"/>
+                  <a:srgbClr val="35424F"/>
+                </a:solidFill>
+                <a:latin typeface="Microsoft YaHei"/>
+                <a:ea typeface="Microsoft YaHei"/>
+                <a:cs typeface="Microsoft YaHei"/>
+              </a:rPr>
+              <a:t>区间并集与总和互校，防重叠漏记</a:t>
+            </a:r>
+          </a:p>
+        </p:txBody>
+      </p:sp>
+      <p:sp>
+        <p:nvSpPr>
+          <p:cNvPr id="34" name="Rectangle 33"/>
           <p:cNvSpPr/>
           <p:nvPr/>
         </p:nvSpPr>
         <p:spPr>
           <a:xfrm>
-            <a:off x="4342457" y="1146069"/>
-            <a:ext cx="2286000" cy="950976"/>
+            <a:off x="6126480" y="1444752"/>
+            <a:ext cx="2377440" cy="896112"/>
           </a:xfrm>
           <a:prstGeom prst="rect">
             <a:avLst/>
@@ -5323,14 +4827,14 @@
       </p:sp>
       <p:sp>
         <p:nvSpPr>
-          <p:cNvPr id="41" name="Rectangle 40"/>
+          <p:cNvPr id="35" name="Rectangle 34"/>
           <p:cNvSpPr/>
           <p:nvPr/>
         </p:nvSpPr>
         <p:spPr>
           <a:xfrm>
-            <a:off x="4342457" y="1146069"/>
-            <a:ext cx="54864" cy="950976"/>
+            <a:off x="6126480" y="1444752"/>
+            <a:ext cx="54864" cy="896112"/>
           </a:xfrm>
           <a:prstGeom prst="rect">
             <a:avLst/>
@@ -5352,14 +4856,14 @@
       </p:sp>
       <p:sp>
         <p:nvSpPr>
-          <p:cNvPr id="42" name="TextBox 41"/>
+          <p:cNvPr id="36" name="TextBox 35"/>
           <p:cNvSpPr txBox="1"/>
           <p:nvPr/>
         </p:nvSpPr>
         <p:spPr>
           <a:xfrm>
-            <a:off x="4488761" y="1182645"/>
-            <a:ext cx="2048256" cy="877824"/>
+            <a:off x="6272784" y="1481328"/>
+            <a:ext cx="2139696" cy="822960"/>
           </a:xfrm>
           <a:prstGeom prst="rect">
             <a:avLst/>
@@ -5451,7 +4955,7 @@
                 <a:ea typeface="Microsoft YaHei"/>
                 <a:cs typeface="Microsoft YaHei"/>
               </a:rPr>
-              <a:t>config → FLOPs/字节 → 下界 → ratio</a:t>
+              <a:t>config → FLOPs / 字节 → 下界与 ratio</a:t>
             </a:r>
           </a:p>
           <a:p>
@@ -5475,42 +4979,385 @@
                 <a:ea typeface="Microsoft YaHei"/>
                 <a:cs typeface="Microsoft YaHei"/>
               </a:rPr>
-              <a:t>专家字节用路由实测 distinct experts</a:t>
-            </a:r>
-          </a:p>
-          <a:p>
-            <a:pPr algn="l" latinLnBrk="0">
-              <a:lnSpc>
-                <a:spcPct val="100000"/>
-              </a:lnSpc>
-              <a:spcBef>
-                <a:spcPts val="0"/>
-              </a:spcBef>
-              <a:spcAft>
-                <a:spcPts val="0"/>
-              </a:spcAft>
-            </a:pPr>
-            <a:r>
-              <a:rPr sz="850" b="1">
-                <a:solidFill>
-                  <a:srgbClr val="1E8A6E"/>
-                </a:solidFill>
-                <a:latin typeface="Microsoft YaHei"/>
-                <a:ea typeface="Microsoft YaHei"/>
-                <a:cs typeface="Microsoft YaHei"/>
-              </a:rPr>
-              <a:t>本轮 </a:t>
-            </a:r>
+              <a:t>专家层字节取路由实测 distinct experts</a:t>
+            </a:r>
+          </a:p>
+          <a:p>
+            <a:pPr algn="l" latinLnBrk="0">
+              <a:lnSpc>
+                <a:spcPct val="100000"/>
+              </a:lnSpc>
+              <a:spcBef>
+                <a:spcPts val="0"/>
+              </a:spcBef>
+              <a:spcAft>
+                <a:spcPts val="0"/>
+              </a:spcAft>
+            </a:pPr>
             <a:r>
               <a:rPr sz="850" b="0">
                 <a:solidFill>
+                  <a:srgbClr val="35424F"/>
+                </a:solidFill>
+                <a:latin typeface="Microsoft YaHei"/>
+                <a:ea typeface="Microsoft YaHei"/>
+                <a:cs typeface="Microsoft YaHei"/>
+              </a:rPr>
+              <a:t>快于下界者判自检证伪，按授权隔离</a:t>
+            </a:r>
+          </a:p>
+        </p:txBody>
+      </p:sp>
+      <p:sp>
+        <p:nvSpPr>
+          <p:cNvPr id="37" name="Rectangle 36"/>
+          <p:cNvSpPr/>
+          <p:nvPr/>
+        </p:nvSpPr>
+        <p:spPr>
+          <a:xfrm>
+            <a:off x="8778240" y="1444752"/>
+            <a:ext cx="2864815" cy="2633472"/>
+          </a:xfrm>
+          <a:prstGeom prst="rect">
+            <a:avLst/>
+          </a:prstGeom>
+          <a:solidFill>
+            <a:srgbClr val="FFFFFF"/>
+          </a:solidFill>
+          <a:ln w="12700">
+            <a:solidFill>
+              <a:srgbClr val="C0612C"/>
+            </a:solidFill>
+          </a:ln>
+        </p:spPr>
+        <p:txBody>
+          <a:bodyPr rtlCol="0" anchor="ctr"/>
+          <a:lstStyle/>
+          <a:p>
+            <a:pPr algn="ctr"/>
+          </a:p>
+        </p:txBody>
+      </p:sp>
+      <p:sp>
+        <p:nvSpPr>
+          <p:cNvPr id="38" name="Rectangle 37"/>
+          <p:cNvSpPr/>
+          <p:nvPr/>
+        </p:nvSpPr>
+        <p:spPr>
+          <a:xfrm>
+            <a:off x="8778240" y="1444752"/>
+            <a:ext cx="54864" cy="2633472"/>
+          </a:xfrm>
+          <a:prstGeom prst="rect">
+            <a:avLst/>
+          </a:prstGeom>
+          <a:solidFill>
+            <a:srgbClr val="C0612C"/>
+          </a:solidFill>
+          <a:ln>
+            <a:noFill/>
+          </a:ln>
+        </p:spPr>
+        <p:txBody>
+          <a:bodyPr rtlCol="0" anchor="ctr"/>
+          <a:lstStyle/>
+          <a:p>
+            <a:pPr algn="ctr"/>
+          </a:p>
+        </p:txBody>
+      </p:sp>
+      <p:sp>
+        <p:nvSpPr>
+          <p:cNvPr id="39" name="TextBox 38"/>
+          <p:cNvSpPr txBox="1"/>
+          <p:nvPr/>
+        </p:nvSpPr>
+        <p:spPr>
+          <a:xfrm>
+            <a:off x="8924544" y="1472184"/>
+            <a:ext cx="2627071" cy="274320"/>
+          </a:xfrm>
+          <a:prstGeom prst="rect">
+            <a:avLst/>
+          </a:prstGeom>
+          <a:noFill/>
+        </p:spPr>
+        <p:txBody>
+          <a:bodyPr wrap="square" anchor="ctr" lIns="0" tIns="0" rIns="0" bIns="0">
+            <a:noAutofit/>
+          </a:bodyPr>
+          <a:lstStyle/>
+          <a:p>
+            <a:pPr algn="l" latinLnBrk="0">
+              <a:lnSpc>
+                <a:spcPct val="100000"/>
+              </a:lnSpc>
+              <a:spcBef>
+                <a:spcPts val="0"/>
+              </a:spcBef>
+              <a:spcAft>
+                <a:spcPts val="0"/>
+              </a:spcAft>
+            </a:pPr>
+            <a:r>
+              <a:rPr sz="1050" b="1">
+                <a:solidFill>
+                  <a:srgbClr val="C0612C"/>
+                </a:solidFill>
+                <a:latin typeface="Arial"/>
+                <a:ea typeface="Microsoft YaHei"/>
+                <a:cs typeface="Microsoft YaHei"/>
+              </a:rPr>
+              <a:t>4 </a:t>
+            </a:r>
+            <a:r>
+              <a:rPr sz="1050" b="1">
+                <a:solidFill>
                   <a:srgbClr val="16202A"/>
                 </a:solidFill>
                 <a:latin typeface="Microsoft YaHei"/>
                 <a:ea typeface="Microsoft YaHei"/>
                 <a:cs typeface="Microsoft YaHei"/>
               </a:rPr>
-              <a:t>两类 GEMM 自检失败，按授权隔离</a:t>
+              <a:t>方案与补丁</a:t>
+            </a:r>
+            <a:r>
+              <a:rPr sz="850" b="0">
+                <a:solidFill>
+                  <a:srgbClr val="66727F"/>
+                </a:solidFill>
+                <a:latin typeface="Microsoft YaHei"/>
+                <a:ea typeface="Microsoft YaHei"/>
+                <a:cs typeface="Microsoft YaHei"/>
+              </a:rPr>
+              <a:t>　全环唯一产生改动的一步</a:t>
+            </a:r>
+          </a:p>
+        </p:txBody>
+      </p:sp>
+      <p:sp>
+        <p:nvSpPr>
+          <p:cNvPr id="40" name="Rectangle 39"/>
+          <p:cNvSpPr/>
+          <p:nvPr/>
+        </p:nvSpPr>
+        <p:spPr>
+          <a:xfrm>
+            <a:off x="8906256" y="1719072"/>
+            <a:ext cx="2608783" cy="794335"/>
+          </a:xfrm>
+          <a:prstGeom prst="rect">
+            <a:avLst/>
+          </a:prstGeom>
+          <a:solidFill>
+            <a:srgbClr val="F6F7F9"/>
+          </a:solidFill>
+          <a:ln>
+            <a:noFill/>
+          </a:ln>
+        </p:spPr>
+        <p:txBody>
+          <a:bodyPr rtlCol="0" anchor="ctr"/>
+          <a:lstStyle/>
+          <a:p>
+            <a:pPr algn="ctr"/>
+          </a:p>
+        </p:txBody>
+      </p:sp>
+      <p:sp>
+        <p:nvSpPr>
+          <p:cNvPr id="41" name="Rectangle 40"/>
+          <p:cNvSpPr/>
+          <p:nvPr/>
+        </p:nvSpPr>
+        <p:spPr>
+          <a:xfrm>
+            <a:off x="8906256" y="1719072"/>
+            <a:ext cx="36576" cy="794335"/>
+          </a:xfrm>
+          <a:prstGeom prst="rect">
+            <a:avLst/>
+          </a:prstGeom>
+          <a:solidFill>
+            <a:srgbClr val="3F63A8"/>
+          </a:solidFill>
+          <a:ln>
+            <a:noFill/>
+          </a:ln>
+        </p:spPr>
+        <p:txBody>
+          <a:bodyPr rtlCol="0" anchor="ctr"/>
+          <a:lstStyle/>
+          <a:p>
+            <a:pPr algn="ctr"/>
+          </a:p>
+        </p:txBody>
+      </p:sp>
+      <p:sp>
+        <p:nvSpPr>
+          <p:cNvPr id="42" name="TextBox 41"/>
+          <p:cNvSpPr txBox="1"/>
+          <p:nvPr/>
+        </p:nvSpPr>
+        <p:spPr>
+          <a:xfrm>
+            <a:off x="9052560" y="1737360"/>
+            <a:ext cx="2425903" cy="757759"/>
+          </a:xfrm>
+          <a:prstGeom prst="rect">
+            <a:avLst/>
+          </a:prstGeom>
+          <a:noFill/>
+        </p:spPr>
+        <p:txBody>
+          <a:bodyPr wrap="square" anchor="ctr" lIns="0" tIns="0" rIns="0" bIns="0">
+            <a:noAutofit/>
+          </a:bodyPr>
+          <a:lstStyle/>
+          <a:p>
+            <a:pPr algn="l" latinLnBrk="0">
+              <a:lnSpc>
+                <a:spcPct val="100000"/>
+              </a:lnSpc>
+              <a:spcBef>
+                <a:spcPts val="0"/>
+              </a:spcBef>
+              <a:spcAft>
+                <a:spcPts val="100"/>
+              </a:spcAft>
+            </a:pPr>
+            <a:r>
+              <a:rPr sz="900" b="1">
+                <a:solidFill>
+                  <a:srgbClr val="3F63A8"/>
+                </a:solidFill>
+                <a:latin typeface="Microsoft YaHei"/>
+                <a:ea typeface="Microsoft YaHei"/>
+                <a:cs typeface="Microsoft YaHei"/>
+              </a:rPr>
+              <a:t>控制器侧 · 封装请求</a:t>
+            </a:r>
+          </a:p>
+          <a:p>
+            <a:pPr algn="l" latinLnBrk="0">
+              <a:lnSpc>
+                <a:spcPct val="100000"/>
+              </a:lnSpc>
+              <a:spcBef>
+                <a:spcPts val="0"/>
+              </a:spcBef>
+              <a:spcAft>
+                <a:spcPts val="0"/>
+              </a:spcAft>
+            </a:pPr>
+            <a:r>
+              <a:rPr sz="750" b="0">
+                <a:solidFill>
+                  <a:srgbClr val="66727F"/>
+                </a:solidFill>
+                <a:latin typeface="Consolas"/>
+                <a:ea typeface="Microsoft YaHei"/>
+                <a:cs typeface="Microsoft YaHei"/>
+              </a:rPr>
+              <a:t>optimization_planner · planner_memory</a:t>
+            </a:r>
+          </a:p>
+          <a:p>
+            <a:pPr algn="l" latinLnBrk="0">
+              <a:lnSpc>
+                <a:spcPct val="100000"/>
+              </a:lnSpc>
+              <a:spcBef>
+                <a:spcPts val="0"/>
+              </a:spcBef>
+              <a:spcAft>
+                <a:spcPts val="200"/>
+              </a:spcAft>
+            </a:pPr>
+            <a:r>
+              <a:rPr sz="750" b="0">
+                <a:solidFill>
+                  <a:srgbClr val="66727F"/>
+                </a:solidFill>
+                <a:latin typeface="Consolas"/>
+                <a:ea typeface="Microsoft YaHei"/>
+                <a:cs typeface="Microsoft YaHei"/>
+              </a:rPr>
+              <a:t>planner_mailbox</a:t>
+            </a:r>
+          </a:p>
+          <a:p>
+            <a:pPr algn="l" latinLnBrk="0">
+              <a:lnSpc>
+                <a:spcPct val="100000"/>
+              </a:lnSpc>
+              <a:spcBef>
+                <a:spcPts val="0"/>
+              </a:spcBef>
+              <a:spcAft>
+                <a:spcPts val="0"/>
+              </a:spcAft>
+            </a:pPr>
+            <a:r>
+              <a:rPr sz="850" b="0">
+                <a:solidFill>
+                  <a:srgbClr val="35424F"/>
+                </a:solidFill>
+                <a:latin typeface="Microsoft YaHei"/>
+                <a:ea typeface="Microsoft YaHei"/>
+                <a:cs typeface="Microsoft YaHei"/>
+              </a:rPr>
+              <a:t>UUID + 请求 SHA + 动作 schema</a:t>
+            </a:r>
+          </a:p>
+          <a:p>
+            <a:pPr algn="l" latinLnBrk="0">
+              <a:lnSpc>
+                <a:spcPct val="100000"/>
+              </a:lnSpc>
+              <a:spcBef>
+                <a:spcPts val="0"/>
+              </a:spcBef>
+              <a:spcAft>
+                <a:spcPts val="0"/>
+              </a:spcAft>
+            </a:pPr>
+            <a:r>
+              <a:rPr sz="850" b="0">
+                <a:solidFill>
+                  <a:srgbClr val="35424F"/>
+                </a:solidFill>
+                <a:latin typeface="Microsoft YaHei"/>
+                <a:ea typeface="Microsoft YaHei"/>
+                <a:cs typeface="Microsoft YaHei"/>
+              </a:rPr>
+              <a:t>上下文 ≤ 18 KB，单条消息 ≤ 28 KB</a:t>
+            </a:r>
+          </a:p>
+          <a:p>
+            <a:pPr algn="l" latinLnBrk="0">
+              <a:lnSpc>
+                <a:spcPct val="100000"/>
+              </a:lnSpc>
+              <a:spcBef>
+                <a:spcPts val="0"/>
+              </a:spcBef>
+              <a:spcAft>
+                <a:spcPts val="0"/>
+              </a:spcAft>
+            </a:pPr>
+            <a:r>
+              <a:rPr sz="850" b="0">
+                <a:solidFill>
+                  <a:srgbClr val="35424F"/>
+                </a:solidFill>
+                <a:latin typeface="Microsoft YaHei"/>
+                <a:ea typeface="Microsoft YaHei"/>
+                <a:cs typeface="Microsoft YaHei"/>
+              </a:rPr>
+              <a:t>ID / SHA 不匹配即拒收，往返全部落盘</a:t>
             </a:r>
           </a:p>
         </p:txBody>
@@ -5523,8 +5370,410 @@
         </p:nvSpPr>
         <p:spPr>
           <a:xfrm>
-            <a:off x="7013871" y="1381590"/>
-            <a:ext cx="2286000" cy="950976"/>
+            <a:off x="8906256" y="2568271"/>
+            <a:ext cx="2608783" cy="930302"/>
+          </a:xfrm>
+          <a:prstGeom prst="rect">
+            <a:avLst/>
+          </a:prstGeom>
+          <a:solidFill>
+            <a:srgbClr val="F6F7F9"/>
+          </a:solidFill>
+          <a:ln>
+            <a:noFill/>
+          </a:ln>
+        </p:spPr>
+        <p:txBody>
+          <a:bodyPr rtlCol="0" anchor="ctr"/>
+          <a:lstStyle/>
+          <a:p>
+            <a:pPr algn="ctr"/>
+          </a:p>
+        </p:txBody>
+      </p:sp>
+      <p:sp>
+        <p:nvSpPr>
+          <p:cNvPr id="44" name="Rectangle 43"/>
+          <p:cNvSpPr/>
+          <p:nvPr/>
+        </p:nvSpPr>
+        <p:spPr>
+          <a:xfrm>
+            <a:off x="8906256" y="2568271"/>
+            <a:ext cx="36576" cy="930302"/>
+          </a:xfrm>
+          <a:prstGeom prst="rect">
+            <a:avLst/>
+          </a:prstGeom>
+          <a:solidFill>
+            <a:srgbClr val="C0612C"/>
+          </a:solidFill>
+          <a:ln>
+            <a:noFill/>
+          </a:ln>
+        </p:spPr>
+        <p:txBody>
+          <a:bodyPr rtlCol="0" anchor="ctr"/>
+          <a:lstStyle/>
+          <a:p>
+            <a:pPr algn="ctr"/>
+          </a:p>
+        </p:txBody>
+      </p:sp>
+      <p:sp>
+        <p:nvSpPr>
+          <p:cNvPr id="45" name="TextBox 44"/>
+          <p:cNvSpPr txBox="1"/>
+          <p:nvPr/>
+        </p:nvSpPr>
+        <p:spPr>
+          <a:xfrm>
+            <a:off x="9052560" y="2586559"/>
+            <a:ext cx="2425903" cy="893726"/>
+          </a:xfrm>
+          <a:prstGeom prst="rect">
+            <a:avLst/>
+          </a:prstGeom>
+          <a:noFill/>
+        </p:spPr>
+        <p:txBody>
+          <a:bodyPr wrap="square" anchor="ctr" lIns="0" tIns="0" rIns="0" bIns="0">
+            <a:noAutofit/>
+          </a:bodyPr>
+          <a:lstStyle/>
+          <a:p>
+            <a:pPr algn="l" latinLnBrk="0">
+              <a:lnSpc>
+                <a:spcPct val="100000"/>
+              </a:lnSpc>
+              <a:spcBef>
+                <a:spcPts val="0"/>
+              </a:spcBef>
+              <a:spcAft>
+                <a:spcPts val="100"/>
+              </a:spcAft>
+            </a:pPr>
+            <a:r>
+              <a:rPr sz="900" b="1">
+                <a:solidFill>
+                  <a:srgbClr val="C0612C"/>
+                </a:solidFill>
+                <a:latin typeface="Microsoft YaHei"/>
+                <a:ea typeface="Microsoft YaHei"/>
+                <a:cs typeface="Microsoft YaHei"/>
+              </a:rPr>
+              <a:t>规划器 · 外部会话</a:t>
+            </a:r>
+          </a:p>
+          <a:p>
+            <a:pPr algn="l" latinLnBrk="0">
+              <a:lnSpc>
+                <a:spcPct val="100000"/>
+              </a:lnSpc>
+              <a:spcBef>
+                <a:spcPts val="0"/>
+              </a:spcBef>
+              <a:spcAft>
+                <a:spcPts val="0"/>
+              </a:spcAft>
+            </a:pPr>
+            <a:r>
+              <a:rPr sz="750" b="0">
+                <a:solidFill>
+                  <a:srgbClr val="66727F"/>
+                </a:solidFill>
+                <a:latin typeface="Consolas"/>
+                <a:ea typeface="Microsoft YaHei"/>
+                <a:cs typeface="Microsoft YaHei"/>
+              </a:rPr>
+              <a:t>/root/optimization_planner</a:t>
+            </a:r>
+          </a:p>
+          <a:p>
+            <a:pPr algn="l" latinLnBrk="0">
+              <a:lnSpc>
+                <a:spcPct val="100000"/>
+              </a:lnSpc>
+              <a:spcBef>
+                <a:spcPts val="0"/>
+              </a:spcBef>
+              <a:spcAft>
+                <a:spcPts val="200"/>
+              </a:spcAft>
+            </a:pPr>
+            <a:r>
+              <a:rPr sz="750" b="0">
+                <a:solidFill>
+                  <a:srgbClr val="66727F"/>
+                </a:solidFill>
+                <a:latin typeface="Consolas"/>
+                <a:ea typeface="Microsoft YaHei"/>
+                <a:cs typeface="Microsoft YaHei"/>
+              </a:rPr>
+              <a:t>planner-skills/ · planner_diagnostics</a:t>
+            </a:r>
+          </a:p>
+          <a:p>
+            <a:pPr algn="l" latinLnBrk="0">
+              <a:lnSpc>
+                <a:spcPct val="100000"/>
+              </a:lnSpc>
+              <a:spcBef>
+                <a:spcPts val="0"/>
+              </a:spcBef>
+              <a:spcAft>
+                <a:spcPts val="0"/>
+              </a:spcAft>
+            </a:pPr>
+            <a:r>
+              <a:rPr sz="850" b="0">
+                <a:solidFill>
+                  <a:srgbClr val="35424F"/>
+                </a:solidFill>
+                <a:latin typeface="Microsoft YaHei"/>
+                <a:ea typeface="Microsoft YaHei"/>
+                <a:cs typeface="Microsoft YaHei"/>
+              </a:rPr>
+              <a:t>读源码与冻结证据，提假设、写补丁</a:t>
+            </a:r>
+          </a:p>
+          <a:p>
+            <a:pPr algn="l" latinLnBrk="0">
+              <a:lnSpc>
+                <a:spcPct val="100000"/>
+              </a:lnSpc>
+              <a:spcBef>
+                <a:spcPts val="0"/>
+              </a:spcBef>
+              <a:spcAft>
+                <a:spcPts val="0"/>
+              </a:spcAft>
+            </a:pPr>
+            <a:r>
+              <a:rPr sz="850" b="0">
+                <a:solidFill>
+                  <a:srgbClr val="35424F"/>
+                </a:solidFill>
+                <a:latin typeface="Microsoft YaHei"/>
+                <a:ea typeface="Microsoft YaHei"/>
+                <a:cs typeface="Microsoft YaHei"/>
+              </a:rPr>
+              <a:t>默认只附 INDEX，一轮最多再取 2 个 SKILL</a:t>
+            </a:r>
+          </a:p>
+          <a:p>
+            <a:pPr algn="l" latinLnBrk="0">
+              <a:lnSpc>
+                <a:spcPct val="100000"/>
+              </a:lnSpc>
+              <a:spcBef>
+                <a:spcPts val="0"/>
+              </a:spcBef>
+              <a:spcAft>
+                <a:spcPts val="0"/>
+              </a:spcAft>
+            </a:pPr>
+            <a:r>
+              <a:rPr sz="850" b="0">
+                <a:solidFill>
+                  <a:srgbClr val="35424F"/>
+                </a:solidFill>
+                <a:latin typeface="Microsoft YaHei"/>
+                <a:ea typeface="Microsoft YaHei"/>
+                <a:cs typeface="Microsoft YaHei"/>
+              </a:rPr>
+              <a:t>证据不足可发起有界诊断，输出 ≤ 64 KiB</a:t>
+            </a:r>
+          </a:p>
+          <a:p>
+            <a:pPr algn="l" latinLnBrk="0">
+              <a:lnSpc>
+                <a:spcPct val="100000"/>
+              </a:lnSpc>
+              <a:spcBef>
+                <a:spcPts val="0"/>
+              </a:spcBef>
+              <a:spcAft>
+                <a:spcPts val="0"/>
+              </a:spcAft>
+            </a:pPr>
+            <a:r>
+              <a:rPr sz="850" b="0">
+                <a:solidFill>
+                  <a:srgbClr val="B4382F"/>
+                </a:solidFill>
+                <a:latin typeface="Microsoft YaHei"/>
+                <a:ea typeface="Microsoft YaHei"/>
+                <a:cs typeface="Microsoft YaHei"/>
+              </a:rPr>
+              <a:t>不能碰设备、起服务、宣布成功</a:t>
+            </a:r>
+          </a:p>
+        </p:txBody>
+      </p:sp>
+      <p:sp>
+        <p:nvSpPr>
+          <p:cNvPr id="46" name="Rectangle 45"/>
+          <p:cNvSpPr/>
+          <p:nvPr/>
+        </p:nvSpPr>
+        <p:spPr>
+          <a:xfrm>
+            <a:off x="8906256" y="3553437"/>
+            <a:ext cx="2608783" cy="415058"/>
+          </a:xfrm>
+          <a:prstGeom prst="rect">
+            <a:avLst/>
+          </a:prstGeom>
+          <a:solidFill>
+            <a:srgbClr val="F6F7F9"/>
+          </a:solidFill>
+          <a:ln>
+            <a:noFill/>
+          </a:ln>
+        </p:spPr>
+        <p:txBody>
+          <a:bodyPr rtlCol="0" anchor="ctr"/>
+          <a:lstStyle/>
+          <a:p>
+            <a:pPr algn="ctr"/>
+          </a:p>
+        </p:txBody>
+      </p:sp>
+      <p:sp>
+        <p:nvSpPr>
+          <p:cNvPr id="47" name="Rectangle 46"/>
+          <p:cNvSpPr/>
+          <p:nvPr/>
+        </p:nvSpPr>
+        <p:spPr>
+          <a:xfrm>
+            <a:off x="8906256" y="3553437"/>
+            <a:ext cx="36576" cy="415058"/>
+          </a:xfrm>
+          <a:prstGeom prst="rect">
+            <a:avLst/>
+          </a:prstGeom>
+          <a:solidFill>
+            <a:srgbClr val="35424F"/>
+          </a:solidFill>
+          <a:ln>
+            <a:noFill/>
+          </a:ln>
+        </p:spPr>
+        <p:txBody>
+          <a:bodyPr rtlCol="0" anchor="ctr"/>
+          <a:lstStyle/>
+          <a:p>
+            <a:pPr algn="ctr"/>
+          </a:p>
+        </p:txBody>
+      </p:sp>
+      <p:sp>
+        <p:nvSpPr>
+          <p:cNvPr id="48" name="TextBox 47"/>
+          <p:cNvSpPr txBox="1"/>
+          <p:nvPr/>
+        </p:nvSpPr>
+        <p:spPr>
+          <a:xfrm>
+            <a:off x="9052560" y="3571725"/>
+            <a:ext cx="2425903" cy="378482"/>
+          </a:xfrm>
+          <a:prstGeom prst="rect">
+            <a:avLst/>
+          </a:prstGeom>
+          <a:noFill/>
+        </p:spPr>
+        <p:txBody>
+          <a:bodyPr wrap="square" anchor="ctr" lIns="0" tIns="0" rIns="0" bIns="0">
+            <a:noAutofit/>
+          </a:bodyPr>
+          <a:lstStyle/>
+          <a:p>
+            <a:pPr algn="l" latinLnBrk="0">
+              <a:lnSpc>
+                <a:spcPct val="100000"/>
+              </a:lnSpc>
+              <a:spcBef>
+                <a:spcPts val="0"/>
+              </a:spcBef>
+              <a:spcAft>
+                <a:spcPts val="100"/>
+              </a:spcAft>
+            </a:pPr>
+            <a:r>
+              <a:rPr sz="900" b="1">
+                <a:solidFill>
+                  <a:srgbClr val="35424F"/>
+                </a:solidFill>
+                <a:latin typeface="Microsoft YaHei"/>
+                <a:ea typeface="Microsoft YaHei"/>
+                <a:cs typeface="Microsoft YaHei"/>
+              </a:rPr>
+              <a:t>人 · 按需介入</a:t>
+            </a:r>
+          </a:p>
+          <a:p>
+            <a:pPr algn="l" latinLnBrk="0">
+              <a:lnSpc>
+                <a:spcPct val="100000"/>
+              </a:lnSpc>
+              <a:spcBef>
+                <a:spcPts val="0"/>
+              </a:spcBef>
+              <a:spcAft>
+                <a:spcPts val="0"/>
+              </a:spcAft>
+            </a:pPr>
+            <a:r>
+              <a:rPr sz="850" b="0">
+                <a:solidFill>
+                  <a:srgbClr val="35424F"/>
+                </a:solidFill>
+                <a:latin typeface="Microsoft YaHei"/>
+                <a:ea typeface="Microsoft YaHei"/>
+                <a:cs typeface="Microsoft YaHei"/>
+              </a:rPr>
+              <a:t>复杂场景由人直接写补丁，或与规划器协同实现</a:t>
+            </a:r>
+          </a:p>
+          <a:p>
+            <a:pPr algn="l" latinLnBrk="0">
+              <a:lnSpc>
+                <a:spcPct val="100000"/>
+              </a:lnSpc>
+              <a:spcBef>
+                <a:spcPts val="0"/>
+              </a:spcBef>
+              <a:spcAft>
+                <a:spcPts val="0"/>
+              </a:spcAft>
+            </a:pPr>
+            <a:r>
+              <a:rPr sz="850" b="0">
+                <a:solidFill>
+                  <a:srgbClr val="35424F"/>
+                </a:solidFill>
+                <a:latin typeface="Microsoft YaHei"/>
+                <a:ea typeface="Microsoft YaHei"/>
+                <a:cs typeface="Microsoft YaHei"/>
+              </a:rPr>
+              <a:t>介入不改变判决路径，同样走下面三道门</a:t>
+            </a:r>
+          </a:p>
+        </p:txBody>
+      </p:sp>
+      <p:sp>
+        <p:nvSpPr>
+          <p:cNvPr id="49" name="Rectangle 48"/>
+          <p:cNvSpPr/>
+          <p:nvPr/>
+        </p:nvSpPr>
+        <p:spPr>
+          <a:xfrm>
+            <a:off x="8778240" y="5084064"/>
+            <a:ext cx="2864815" cy="896112"/>
           </a:xfrm>
           <a:prstGeom prst="rect">
             <a:avLst/>
@@ -5548,20 +5797,20 @@
       </p:sp>
       <p:sp>
         <p:nvSpPr>
-          <p:cNvPr id="44" name="Rectangle 43"/>
+          <p:cNvPr id="50" name="Rectangle 49"/>
           <p:cNvSpPr/>
           <p:nvPr/>
         </p:nvSpPr>
         <p:spPr>
           <a:xfrm>
-            <a:off x="7013871" y="1381590"/>
-            <a:ext cx="54864" cy="950976"/>
+            <a:off x="8778240" y="5084064"/>
+            <a:ext cx="54864" cy="896112"/>
           </a:xfrm>
           <a:prstGeom prst="rect">
             <a:avLst/>
           </a:prstGeom>
           <a:solidFill>
-            <a:srgbClr val="C0612C"/>
+            <a:srgbClr val="3F63A8"/>
           </a:solidFill>
           <a:ln>
             <a:noFill/>
@@ -5577,14 +5826,14 @@
       </p:sp>
       <p:sp>
         <p:nvSpPr>
-          <p:cNvPr id="45" name="TextBox 44"/>
+          <p:cNvPr id="51" name="TextBox 50"/>
           <p:cNvSpPr txBox="1"/>
           <p:nvPr/>
         </p:nvSpPr>
         <p:spPr>
           <a:xfrm>
-            <a:off x="7160175" y="1418166"/>
-            <a:ext cx="2048256" cy="877824"/>
+            <a:off x="8924544" y="5120640"/>
+            <a:ext cx="2627071" cy="822960"/>
           </a:xfrm>
           <a:prstGeom prst="rect">
             <a:avLst/>
@@ -5611,13 +5860,13 @@
             <a:r>
               <a:rPr sz="1050" b="1">
                 <a:solidFill>
-                  <a:srgbClr val="C0612C"/>
+                  <a:srgbClr val="3F63A8"/>
                 </a:solidFill>
                 <a:latin typeface="Arial"/>
                 <a:ea typeface="Microsoft YaHei"/>
                 <a:cs typeface="Microsoft YaHei"/>
               </a:rPr>
-              <a:t>4 </a:t>
+              <a:t>5 </a:t>
             </a:r>
             <a:r>
               <a:rPr sz="1050" b="1">
@@ -5628,7 +5877,7 @@
                 <a:ea typeface="Microsoft YaHei"/>
                 <a:cs typeface="Microsoft YaHei"/>
               </a:rPr>
-              <a:t>规划请求</a:t>
+              <a:t>落地 · 构建</a:t>
             </a:r>
           </a:p>
           <a:p>
@@ -5652,7 +5901,7 @@
                 <a:ea typeface="Microsoft YaHei"/>
                 <a:cs typeface="Microsoft YaHei"/>
               </a:rPr>
-              <a:t>optimization_planner</a:t>
+              <a:t>git_workspace · server · development_workspace</a:t>
             </a:r>
           </a:p>
           <a:p>
@@ -5676,7 +5925,7 @@
                 <a:ea typeface="Microsoft YaHei"/>
                 <a:cs typeface="Microsoft YaHei"/>
               </a:rPr>
-              <a:t>planner_memory · planner_mailbox</a:t>
+              <a:t>optimization_adapters</a:t>
             </a:r>
           </a:p>
           <a:p>
@@ -5700,7 +5949,7 @@
                 <a:ea typeface="Microsoft YaHei"/>
                 <a:cs typeface="Microsoft YaHei"/>
               </a:rPr>
-              <a:t>UUID + 请求 SHA + 动作 schema</a:t>
+              <a:t>在源码工作区原位构建，打隔离补丁</a:t>
             </a:r>
           </a:p>
           <a:p>
@@ -5724,306 +5973,21 @@
                 <a:ea typeface="Microsoft YaHei"/>
                 <a:cs typeface="Microsoft YaHei"/>
               </a:rPr>
-              <a:t>上下文 ≤ 18 KB，整条消息 ≤ 28 KB</a:t>
-            </a:r>
-          </a:p>
-          <a:p>
-            <a:pPr algn="l" latinLnBrk="0">
-              <a:lnSpc>
-                <a:spcPct val="100000"/>
-              </a:lnSpc>
-              <a:spcBef>
-                <a:spcPts val="0"/>
-              </a:spcBef>
-              <a:spcAft>
-                <a:spcPts val="0"/>
-              </a:spcAft>
-            </a:pPr>
-            <a:r>
-              <a:rPr sz="850" b="1">
-                <a:solidFill>
-                  <a:srgbClr val="C0612C"/>
-                </a:solidFill>
-                <a:latin typeface="Microsoft YaHei"/>
-                <a:ea typeface="Microsoft YaHei"/>
-                <a:cs typeface="Microsoft YaHei"/>
-              </a:rPr>
-              <a:t>本轮 </a:t>
-            </a:r>
-            <a:r>
-              <a:rPr sz="850" b="0">
-                <a:solidFill>
-                  <a:srgbClr val="16202A"/>
-                </a:solidFill>
-                <a:latin typeface="Microsoft YaHei"/>
-                <a:ea typeface="Microsoft YaHei"/>
-                <a:cs typeface="Microsoft YaHei"/>
-              </a:rPr>
-              <a:t>18 轮往来，全部落盘</a:t>
-            </a:r>
-          </a:p>
-        </p:txBody>
-      </p:sp>
-      <p:sp>
-        <p:nvSpPr>
-          <p:cNvPr id="46" name="Rectangle 45"/>
+              <a:t>只增量编译已登记的 standalone 组件</a:t>
+            </a:r>
+          </a:p>
+        </p:txBody>
+      </p:sp>
+      <p:sp>
+        <p:nvSpPr>
+          <p:cNvPr id="52" name="Rectangle 51"/>
           <p:cNvSpPr/>
           <p:nvPr/>
         </p:nvSpPr>
         <p:spPr>
           <a:xfrm>
-            <a:off x="9150641" y="2677644"/>
-            <a:ext cx="2286000" cy="950976"/>
-          </a:xfrm>
-          <a:prstGeom prst="rect">
-            <a:avLst/>
-          </a:prstGeom>
-          <a:solidFill>
-            <a:srgbClr val="FFFFFF"/>
-          </a:solidFill>
-          <a:ln w="12700">
-            <a:solidFill>
-              <a:srgbClr val="C0612C"/>
-            </a:solidFill>
-            <a:prstDash val="dash"/>
-          </a:ln>
-        </p:spPr>
-        <p:txBody>
-          <a:bodyPr rtlCol="0" anchor="ctr"/>
-          <a:lstStyle/>
-          <a:p>
-            <a:pPr algn="ctr"/>
-          </a:p>
-        </p:txBody>
-      </p:sp>
-      <p:sp>
-        <p:nvSpPr>
-          <p:cNvPr id="47" name="Rectangle 46"/>
-          <p:cNvSpPr/>
-          <p:nvPr/>
-        </p:nvSpPr>
-        <p:spPr>
-          <a:xfrm>
-            <a:off x="9150641" y="2677644"/>
-            <a:ext cx="54864" cy="950976"/>
-          </a:xfrm>
-          <a:prstGeom prst="rect">
-            <a:avLst/>
-          </a:prstGeom>
-          <a:solidFill>
-            <a:srgbClr val="C0612C"/>
-          </a:solidFill>
-          <a:ln>
-            <a:noFill/>
-          </a:ln>
-        </p:spPr>
-        <p:txBody>
-          <a:bodyPr rtlCol="0" anchor="ctr"/>
-          <a:lstStyle/>
-          <a:p>
-            <a:pPr algn="ctr"/>
-          </a:p>
-        </p:txBody>
-      </p:sp>
-      <p:sp>
-        <p:nvSpPr>
-          <p:cNvPr id="48" name="TextBox 47"/>
-          <p:cNvSpPr txBox="1"/>
-          <p:nvPr/>
-        </p:nvSpPr>
-        <p:spPr>
-          <a:xfrm>
-            <a:off x="9296945" y="2714220"/>
-            <a:ext cx="2048256" cy="877824"/>
-          </a:xfrm>
-          <a:prstGeom prst="rect">
-            <a:avLst/>
-          </a:prstGeom>
-          <a:noFill/>
-        </p:spPr>
-        <p:txBody>
-          <a:bodyPr wrap="square" anchor="ctr" lIns="0" tIns="0" rIns="0" bIns="0">
-            <a:noAutofit/>
-          </a:bodyPr>
-          <a:lstStyle/>
-          <a:p>
-            <a:pPr algn="l" latinLnBrk="0">
-              <a:lnSpc>
-                <a:spcPct val="100000"/>
-              </a:lnSpc>
-              <a:spcBef>
-                <a:spcPts val="0"/>
-              </a:spcBef>
-              <a:spcAft>
-                <a:spcPts val="100"/>
-              </a:spcAft>
-            </a:pPr>
-            <a:r>
-              <a:rPr sz="1050" b="1">
-                <a:solidFill>
-                  <a:srgbClr val="C0612C"/>
-                </a:solidFill>
-                <a:latin typeface="Arial"/>
-                <a:ea typeface="Microsoft YaHei"/>
-                <a:cs typeface="Microsoft YaHei"/>
-              </a:rPr>
-              <a:t>5 </a:t>
-            </a:r>
-            <a:r>
-              <a:rPr sz="1050" b="1">
-                <a:solidFill>
-                  <a:srgbClr val="16202A"/>
-                </a:solidFill>
-                <a:latin typeface="Microsoft YaHei"/>
-                <a:ea typeface="Microsoft YaHei"/>
-                <a:cs typeface="Microsoft YaHei"/>
-              </a:rPr>
-              <a:t>Codex subagent</a:t>
-            </a:r>
-          </a:p>
-          <a:p>
-            <a:pPr algn="l" latinLnBrk="0">
-              <a:lnSpc>
-                <a:spcPct val="100000"/>
-              </a:lnSpc>
-              <a:spcBef>
-                <a:spcPts val="0"/>
-              </a:spcBef>
-              <a:spcAft>
-                <a:spcPts val="200"/>
-              </a:spcAft>
-            </a:pPr>
-            <a:r>
-              <a:rPr sz="750" b="0">
-                <a:solidFill>
-                  <a:srgbClr val="66727F"/>
-                </a:solidFill>
-                <a:latin typeface="Consolas"/>
-                <a:ea typeface="Microsoft YaHei"/>
-                <a:cs typeface="Microsoft YaHei"/>
-              </a:rPr>
-              <a:t>/root/optimization_planner</a:t>
-            </a:r>
-          </a:p>
-          <a:p>
-            <a:pPr algn="l" latinLnBrk="0">
-              <a:lnSpc>
-                <a:spcPct val="100000"/>
-              </a:lnSpc>
-              <a:spcBef>
-                <a:spcPts val="0"/>
-              </a:spcBef>
-              <a:spcAft>
-                <a:spcPts val="0"/>
-              </a:spcAft>
-            </a:pPr>
-            <a:r>
-              <a:rPr sz="850" b="0">
-                <a:solidFill>
-                  <a:srgbClr val="35424F"/>
-                </a:solidFill>
-                <a:latin typeface="Microsoft YaHei"/>
-                <a:ea typeface="Microsoft YaHei"/>
-                <a:cs typeface="Microsoft YaHei"/>
-              </a:rPr>
-              <a:t>读源码与冻结证据，提假设、写补丁</a:t>
-            </a:r>
-          </a:p>
-          <a:p>
-            <a:pPr algn="l" latinLnBrk="0">
-              <a:lnSpc>
-                <a:spcPct val="100000"/>
-              </a:lnSpc>
-              <a:spcBef>
-                <a:spcPts val="0"/>
-              </a:spcBef>
-              <a:spcAft>
-                <a:spcPts val="0"/>
-              </a:spcAft>
-            </a:pPr>
-            <a:r>
-              <a:rPr sz="850" b="0">
-                <a:solidFill>
-                  <a:srgbClr val="35424F"/>
-                </a:solidFill>
-                <a:latin typeface="Microsoft YaHei"/>
-                <a:ea typeface="Microsoft YaHei"/>
-                <a:cs typeface="Microsoft YaHei"/>
-              </a:rPr>
-              <a:t>read/search/list/probe/patch/stop</a:t>
-            </a:r>
-          </a:p>
-          <a:p>
-            <a:pPr algn="l" latinLnBrk="0">
-              <a:lnSpc>
-                <a:spcPct val="100000"/>
-              </a:lnSpc>
-              <a:spcBef>
-                <a:spcPts val="0"/>
-              </a:spcBef>
-              <a:spcAft>
-                <a:spcPts val="0"/>
-              </a:spcAft>
-            </a:pPr>
-            <a:r>
-              <a:rPr sz="850" b="0">
-                <a:solidFill>
-                  <a:srgbClr val="B4382F"/>
-                </a:solidFill>
-                <a:latin typeface="Microsoft YaHei"/>
-                <a:ea typeface="Microsoft YaHei"/>
-                <a:cs typeface="Microsoft YaHei"/>
-              </a:rPr>
-              <a:t>不能碰设备、起服务、宣布成功</a:t>
-            </a:r>
-          </a:p>
-          <a:p>
-            <a:pPr algn="l" latinLnBrk="0">
-              <a:lnSpc>
-                <a:spcPct val="100000"/>
-              </a:lnSpc>
-              <a:spcBef>
-                <a:spcPts val="0"/>
-              </a:spcBef>
-              <a:spcAft>
-                <a:spcPts val="0"/>
-              </a:spcAft>
-            </a:pPr>
-            <a:r>
-              <a:rPr sz="850" b="1">
-                <a:solidFill>
-                  <a:srgbClr val="C0612C"/>
-                </a:solidFill>
-                <a:latin typeface="Microsoft YaHei"/>
-                <a:ea typeface="Microsoft YaHei"/>
-                <a:cs typeface="Microsoft YaHei"/>
-              </a:rPr>
-              <a:t>本轮 </a:t>
-            </a:r>
-            <a:r>
-              <a:rPr sz="850" b="0">
-                <a:solidFill>
-                  <a:srgbClr val="16202A"/>
-                </a:solidFill>
-                <a:latin typeface="Microsoft YaHei"/>
-                <a:ea typeface="Microsoft YaHei"/>
-                <a:cs typeface="Microsoft YaHei"/>
-              </a:rPr>
-              <a:t>6 轮读了 roofline-fusion-advisor</a:t>
-            </a:r>
-          </a:p>
-        </p:txBody>
-      </p:sp>
-      <p:sp>
-        <p:nvSpPr>
-          <p:cNvPr id="49" name="Rectangle 48"/>
-          <p:cNvSpPr/>
-          <p:nvPr/>
-        </p:nvSpPr>
-        <p:spPr>
-          <a:xfrm>
-            <a:off x="9150641" y="3960899"/>
-            <a:ext cx="2286000" cy="950976"/>
+            <a:off x="5989320" y="5084064"/>
+            <a:ext cx="2377440" cy="896112"/>
           </a:xfrm>
           <a:prstGeom prst="rect">
             <a:avLst/>
@@ -6047,14 +6011,14 @@
       </p:sp>
       <p:sp>
         <p:nvSpPr>
-          <p:cNvPr id="50" name="Rectangle 49"/>
+          <p:cNvPr id="53" name="Rectangle 52"/>
           <p:cNvSpPr/>
           <p:nvPr/>
         </p:nvSpPr>
         <p:spPr>
           <a:xfrm>
-            <a:off x="9150641" y="3960899"/>
-            <a:ext cx="54864" cy="950976"/>
+            <a:off x="5989320" y="5084064"/>
+            <a:ext cx="54864" cy="896112"/>
           </a:xfrm>
           <a:prstGeom prst="rect">
             <a:avLst/>
@@ -6076,14 +6040,14 @@
       </p:sp>
       <p:sp>
         <p:nvSpPr>
-          <p:cNvPr id="51" name="TextBox 50"/>
+          <p:cNvPr id="54" name="TextBox 53"/>
           <p:cNvSpPr txBox="1"/>
           <p:nvPr/>
         </p:nvSpPr>
         <p:spPr>
           <a:xfrm>
-            <a:off x="9296945" y="3997475"/>
-            <a:ext cx="2048256" cy="877824"/>
+            <a:off x="6135624" y="5120640"/>
+            <a:ext cx="2139696" cy="822960"/>
           </a:xfrm>
           <a:prstGeom prst="rect">
             <a:avLst/>
@@ -6127,19 +6091,19 @@
                 <a:ea typeface="Microsoft YaHei"/>
                 <a:cs typeface="Microsoft YaHei"/>
               </a:rPr>
-              <a:t>落地</a:t>
-            </a:r>
-          </a:p>
-          <a:p>
-            <a:pPr algn="l" latinLnBrk="0">
-              <a:lnSpc>
-                <a:spcPct val="100000"/>
-              </a:lnSpc>
-              <a:spcBef>
-                <a:spcPts val="0"/>
-              </a:spcBef>
-              <a:spcAft>
-                <a:spcPts val="0"/>
+              <a:t>算子级微测初筛</a:t>
+            </a:r>
+          </a:p>
+          <a:p>
+            <a:pPr algn="l" latinLnBrk="0">
+              <a:lnSpc>
+                <a:spcPct val="100000"/>
+              </a:lnSpc>
+              <a:spcBef>
+                <a:spcPts val="0"/>
+              </a:spcBef>
+              <a:spcAft>
+                <a:spcPts val="200"/>
               </a:spcAft>
             </a:pPr>
             <a:r>
@@ -6151,55 +6115,7 @@
                 <a:ea typeface="Microsoft YaHei"/>
                 <a:cs typeface="Microsoft YaHei"/>
               </a:rPr>
-              <a:t>git_workspace · server</a:t>
-            </a:r>
-          </a:p>
-          <a:p>
-            <a:pPr algn="l" latinLnBrk="0">
-              <a:lnSpc>
-                <a:spcPct val="100000"/>
-              </a:lnSpc>
-              <a:spcBef>
-                <a:spcPts val="0"/>
-              </a:spcBef>
-              <a:spcAft>
-                <a:spcPts val="0"/>
-              </a:spcAft>
-            </a:pPr>
-            <a:r>
-              <a:rPr sz="750" b="0">
-                <a:solidFill>
-                  <a:srgbClr val="66727F"/>
-                </a:solidFill>
-                <a:latin typeface="Consolas"/>
-                <a:ea typeface="Microsoft YaHei"/>
-                <a:cs typeface="Microsoft YaHei"/>
-              </a:rPr>
-              <a:t>development_workspace</a:t>
-            </a:r>
-          </a:p>
-          <a:p>
-            <a:pPr algn="l" latinLnBrk="0">
-              <a:lnSpc>
-                <a:spcPct val="100000"/>
-              </a:lnSpc>
-              <a:spcBef>
-                <a:spcPts val="0"/>
-              </a:spcBef>
-              <a:spcAft>
-                <a:spcPts val="200"/>
-              </a:spcAft>
-            </a:pPr>
-            <a:r>
-              <a:rPr sz="750" b="0">
-                <a:solidFill>
-                  <a:srgbClr val="66727F"/>
-                </a:solidFill>
-                <a:latin typeface="Consolas"/>
-                <a:ea typeface="Microsoft YaHei"/>
-                <a:cs typeface="Microsoft YaHei"/>
-              </a:rPr>
-              <a:t>optimization_adapters</a:t>
+              <a:t>device 侧 · 隔离算子链</a:t>
             </a:r>
           </a:p>
           <a:p>
@@ -6223,56 +6139,45 @@
                 <a:ea typeface="Microsoft YaHei"/>
                 <a:cs typeface="Microsoft YaHei"/>
               </a:rPr>
-              <a:t>原位建版本、打隔离补丁、只编登记组件</a:t>
-            </a:r>
-          </a:p>
-          <a:p>
-            <a:pPr algn="l" latinLnBrk="0">
-              <a:lnSpc>
-                <a:spcPct val="100000"/>
-              </a:lnSpc>
-              <a:spcBef>
-                <a:spcPts val="0"/>
-              </a:spcBef>
-              <a:spcAft>
-                <a:spcPts val="0"/>
-              </a:spcAft>
-            </a:pPr>
-            <a:r>
-              <a:rPr sz="850" b="1">
-                <a:solidFill>
-                  <a:srgbClr val="3F63A8"/>
-                </a:solidFill>
-                <a:latin typeface="Microsoft YaHei"/>
-                <a:ea typeface="Microsoft YaHei"/>
-                <a:cs typeface="Microsoft YaHei"/>
-              </a:rPr>
-              <a:t>本轮 </a:t>
-            </a:r>
+              <a:t>对照与候选对称预热，µs 级微测</a:t>
+            </a:r>
+          </a:p>
+          <a:p>
+            <a:pPr algn="l" latinLnBrk="0">
+              <a:lnSpc>
+                <a:spcPct val="100000"/>
+              </a:lnSpc>
+              <a:spcBef>
+                <a:spcPts val="0"/>
+              </a:spcBef>
+              <a:spcAft>
+                <a:spcPts val="0"/>
+              </a:spcAft>
+            </a:pPr>
             <a:r>
               <a:rPr sz="850" b="0">
                 <a:solidFill>
-                  <a:srgbClr val="16202A"/>
-                </a:solidFill>
-                <a:latin typeface="Microsoft YaHei"/>
-                <a:ea typeface="Microsoft YaHei"/>
-                <a:cs typeface="Microsoft YaHei"/>
-              </a:rPr>
-              <a:t>5 / 16 卡在构建身份 → retry</a:t>
-            </a:r>
-          </a:p>
-        </p:txBody>
-      </p:sp>
-      <p:sp>
-        <p:nvSpPr>
-          <p:cNvPr id="52" name="Rectangle 51"/>
+                  <a:srgbClr val="35424F"/>
+                </a:solidFill>
+                <a:latin typeface="Microsoft YaHei"/>
+                <a:ea typeface="Microsoft YaHei"/>
+                <a:cs typeface="Microsoft YaHei"/>
+              </a:rPr>
+              <a:t>提速达到筛选阈值才记 device_screened</a:t>
+            </a:r>
+          </a:p>
+        </p:txBody>
+      </p:sp>
+      <p:sp>
+        <p:nvSpPr>
+          <p:cNvPr id="55" name="Rectangle 54"/>
           <p:cNvSpPr/>
           <p:nvPr/>
         </p:nvSpPr>
         <p:spPr>
           <a:xfrm>
-            <a:off x="7013871" y="5256953"/>
-            <a:ext cx="2286000" cy="950976"/>
+            <a:off x="3200400" y="5084064"/>
+            <a:ext cx="2377440" cy="896112"/>
           </a:xfrm>
           <a:prstGeom prst="rect">
             <a:avLst/>
@@ -6296,14 +6201,14 @@
       </p:sp>
       <p:sp>
         <p:nvSpPr>
-          <p:cNvPr id="53" name="Rectangle 52"/>
+          <p:cNvPr id="56" name="Rectangle 55"/>
           <p:cNvSpPr/>
           <p:nvPr/>
         </p:nvSpPr>
         <p:spPr>
           <a:xfrm>
-            <a:off x="7013871" y="5256953"/>
-            <a:ext cx="54864" cy="950976"/>
+            <a:off x="3200400" y="5084064"/>
+            <a:ext cx="54864" cy="896112"/>
           </a:xfrm>
           <a:prstGeom prst="rect">
             <a:avLst/>
@@ -6325,14 +6230,14 @@
       </p:sp>
       <p:sp>
         <p:nvSpPr>
-          <p:cNvPr id="54" name="TextBox 53"/>
+          <p:cNvPr id="57" name="TextBox 56"/>
           <p:cNvSpPr txBox="1"/>
           <p:nvPr/>
         </p:nvSpPr>
         <p:spPr>
           <a:xfrm>
-            <a:off x="7160175" y="5293529"/>
-            <a:ext cx="2048256" cy="877824"/>
+            <a:off x="3346704" y="5120640"/>
+            <a:ext cx="2139696" cy="822960"/>
           </a:xfrm>
           <a:prstGeom prst="rect">
             <a:avLst/>
@@ -6376,7 +6281,7 @@
                 <a:ea typeface="Microsoft YaHei"/>
                 <a:cs typeface="Microsoft YaHei"/>
               </a:rPr>
-              <a:t>C 筛选</a:t>
+              <a:t>数值 + 质量门</a:t>
             </a:r>
           </a:p>
           <a:p>
@@ -6400,7 +6305,7 @@
                 <a:ea typeface="Microsoft YaHei"/>
                 <a:cs typeface="Microsoft YaHei"/>
               </a:rPr>
-              <a:t>device 侧 · 隔离算子链</a:t>
+              <a:t>evaluation</a:t>
             </a:r>
           </a:p>
           <a:p>
@@ -6424,7 +6329,7 @@
                 <a:ea typeface="Microsoft YaHei"/>
                 <a:cs typeface="Microsoft YaHei"/>
               </a:rPr>
-              <a:t>对照与候选对称预热，µs 级微测</a:t>
+              <a:t>固定文本探针比对数概率，偏差须在容差内</a:t>
             </a:r>
           </a:p>
           <a:p>
@@ -6448,56 +6353,21 @@
                 <a:ea typeface="Microsoft YaHei"/>
                 <a:cs typeface="Microsoft YaHei"/>
               </a:rPr>
-              <a:t>≥ 2% 才记 device_screened</a:t>
-            </a:r>
-          </a:p>
-          <a:p>
-            <a:pPr algn="l" latinLnBrk="0">
-              <a:lnSpc>
-                <a:spcPct val="100000"/>
-              </a:lnSpc>
-              <a:spcBef>
-                <a:spcPts val="0"/>
-              </a:spcBef>
-              <a:spcAft>
-                <a:spcPts val="0"/>
-              </a:spcAft>
-            </a:pPr>
-            <a:r>
-              <a:rPr sz="850" b="1">
-                <a:solidFill>
-                  <a:srgbClr val="3F63A8"/>
-                </a:solidFill>
-                <a:latin typeface="Microsoft YaHei"/>
-                <a:ea typeface="Microsoft YaHei"/>
-                <a:cs typeface="Microsoft YaHei"/>
-              </a:rPr>
-              <a:t>本轮 </a:t>
-            </a:r>
-            <a:r>
-              <a:rPr sz="850" b="0">
-                <a:solidFill>
-                  <a:srgbClr val="16202A"/>
-                </a:solidFill>
-                <a:latin typeface="Microsoft YaHei"/>
-                <a:ea typeface="Microsoft YaHei"/>
-                <a:cs typeface="Microsoft YaHei"/>
-              </a:rPr>
-              <a:t>6 个通过，+1.61% / +0.77% 被拒</a:t>
-            </a:r>
-          </a:p>
-        </p:txBody>
-      </p:sp>
-      <p:sp>
-        <p:nvSpPr>
-          <p:cNvPr id="55" name="Rectangle 54"/>
+              <a:t>评测得分不降，解析失败与截断都计入</a:t>
+            </a:r>
+          </a:p>
+        </p:txBody>
+      </p:sp>
+      <p:sp>
+        <p:nvSpPr>
+          <p:cNvPr id="58" name="Rectangle 57"/>
           <p:cNvSpPr/>
           <p:nvPr/>
         </p:nvSpPr>
         <p:spPr>
           <a:xfrm>
-            <a:off x="4342457" y="5492474"/>
-            <a:ext cx="2286000" cy="950976"/>
+            <a:off x="548640" y="5084064"/>
+            <a:ext cx="2377440" cy="896112"/>
           </a:xfrm>
           <a:prstGeom prst="rect">
             <a:avLst/>
@@ -6521,14 +6391,14 @@
       </p:sp>
       <p:sp>
         <p:nvSpPr>
-          <p:cNvPr id="56" name="Rectangle 55"/>
+          <p:cNvPr id="59" name="Rectangle 58"/>
           <p:cNvSpPr/>
           <p:nvPr/>
         </p:nvSpPr>
         <p:spPr>
           <a:xfrm>
-            <a:off x="4342457" y="5492474"/>
-            <a:ext cx="54864" cy="950976"/>
+            <a:off x="548640" y="5084064"/>
+            <a:ext cx="54864" cy="896112"/>
           </a:xfrm>
           <a:prstGeom prst="rect">
             <a:avLst/>
@@ -6550,14 +6420,14 @@
       </p:sp>
       <p:sp>
         <p:nvSpPr>
-          <p:cNvPr id="57" name="TextBox 56"/>
+          <p:cNvPr id="60" name="TextBox 59"/>
           <p:cNvSpPr txBox="1"/>
           <p:nvPr/>
         </p:nvSpPr>
         <p:spPr>
           <a:xfrm>
-            <a:off x="4488761" y="5529050"/>
-            <a:ext cx="2048256" cy="877824"/>
+            <a:off x="694944" y="5120640"/>
+            <a:ext cx="2139696" cy="822960"/>
           </a:xfrm>
           <a:prstGeom prst="rect">
             <a:avLst/>
@@ -6601,7 +6471,31 @@
                 <a:ea typeface="Microsoft YaHei"/>
                 <a:cs typeface="Microsoft YaHei"/>
               </a:rPr>
-              <a:t>数值 + 质量门</a:t>
+              <a:t>端到端三方复验</a:t>
+            </a:r>
+          </a:p>
+          <a:p>
+            <a:pPr algn="l" latinLnBrk="0">
+              <a:lnSpc>
+                <a:spcPct val="100000"/>
+              </a:lnSpc>
+              <a:spcBef>
+                <a:spcPts val="0"/>
+              </a:spcBef>
+              <a:spcAft>
+                <a:spcPts val="0"/>
+              </a:spcAft>
+            </a:pPr>
+            <a:r>
+              <a:rPr sz="750" b="0">
+                <a:solidFill>
+                  <a:srgbClr val="66727F"/>
+                </a:solidFill>
+                <a:latin typeface="Consolas"/>
+                <a:ea typeface="Microsoft YaHei"/>
+                <a:cs typeface="Microsoft YaHei"/>
+              </a:rPr>
+              <a:t>optimization_staging · benchmark</a:t>
             </a:r>
           </a:p>
           <a:p>
@@ -6625,7 +6519,7 @@
                 <a:ea typeface="Microsoft YaHei"/>
                 <a:cs typeface="Microsoft YaHei"/>
               </a:rPr>
-              <a:t>evaluation</a:t>
+              <a:t>selfiterate_gates</a:t>
             </a:r>
           </a:p>
           <a:p>
@@ -6649,7 +6543,7 @@
                 <a:ea typeface="Microsoft YaHei"/>
                 <a:cs typeface="Microsoft YaHei"/>
               </a:rPr>
-              <a:t>3 个文本探针 |Δlogprob| ≤ 0.03</a:t>
+              <a:t>原始 / 上一版 / 候选共用加载库 SHA</a:t>
             </a:r>
           </a:p>
           <a:p>
@@ -6673,67 +6567,585 @@
                 <a:ea typeface="Microsoft YaHei"/>
                 <a:cs typeface="Microsoft YaHei"/>
               </a:rPr>
-              <a:t>MMStar 冻结 60 题，解析、截断都计入</a:t>
-            </a:r>
-          </a:p>
-          <a:p>
-            <a:pPr algn="l" latinLnBrk="0">
-              <a:lnSpc>
-                <a:spcPct val="100000"/>
-              </a:lnSpc>
-              <a:spcBef>
-                <a:spcPts val="0"/>
-              </a:spcBef>
-              <a:spcAft>
-                <a:spcPts val="0"/>
-              </a:spcAft>
-            </a:pPr>
-            <a:r>
-              <a:rPr sz="850" b="1">
-                <a:solidFill>
-                  <a:srgbClr val="3F63A8"/>
-                </a:solidFill>
-                <a:latin typeface="Microsoft YaHei"/>
-                <a:ea typeface="Microsoft YaHei"/>
-                <a:cs typeface="Microsoft YaHei"/>
-              </a:rPr>
-              <a:t>本轮 </a:t>
-            </a:r>
-            <a:r>
-              <a:rPr sz="850" b="0">
-                <a:solidFill>
-                  <a:srgbClr val="16202A"/>
-                </a:solidFill>
-                <a:latin typeface="Microsoft YaHei"/>
-                <a:ea typeface="Microsoft YaHei"/>
-                <a:cs typeface="Microsoft YaHei"/>
-              </a:rPr>
-              <a:t>交付版 Δ 0.0 · MMStar 45/60</a:t>
-            </a:r>
-          </a:p>
-        </p:txBody>
-      </p:sp>
-      <p:sp>
-        <p:nvSpPr>
-          <p:cNvPr id="58" name="Rectangle 57"/>
+              <a:t>重复取中位，关 profiler，须过噪声门</a:t>
+            </a:r>
+          </a:p>
+        </p:txBody>
+      </p:sp>
+      <p:sp>
+        <p:nvSpPr>
+          <p:cNvPr id="61" name="TextBox 60"/>
+          <p:cNvSpPr txBox="1"/>
+          <p:nvPr/>
+        </p:nvSpPr>
+        <p:spPr>
+          <a:xfrm>
+            <a:off x="2240280" y="2414016"/>
+            <a:ext cx="1691640" cy="475488"/>
+          </a:xfrm>
+          <a:prstGeom prst="rect">
+            <a:avLst/>
+          </a:prstGeom>
+          <a:noFill/>
+        </p:spPr>
+        <p:txBody>
+          <a:bodyPr wrap="square" anchor="ctr" lIns="0" tIns="0" rIns="0" bIns="0">
+            <a:noAutofit/>
+          </a:bodyPr>
+          <a:lstStyle/>
+          <a:p>
+            <a:pPr algn="l" latinLnBrk="0">
+              <a:lnSpc>
+                <a:spcPct val="100000"/>
+              </a:lnSpc>
+              <a:spcBef>
+                <a:spcPts val="0"/>
+              </a:spcBef>
+              <a:spcAft>
+                <a:spcPts val="0"/>
+              </a:spcAft>
+            </a:pPr>
+            <a:r>
+              <a:rPr sz="800" b="0">
+                <a:solidFill>
+                  <a:srgbClr val="66727F"/>
+                </a:solidFill>
+                <a:latin typeface="Microsoft YaHei"/>
+                <a:ea typeface="Microsoft YaHei"/>
+                <a:cs typeface="Microsoft YaHei"/>
+              </a:rPr>
+              <a:t>Chrome trace</a:t>
+            </a:r>
+          </a:p>
+          <a:p>
+            <a:pPr algn="l" latinLnBrk="0">
+              <a:lnSpc>
+                <a:spcPct val="100000"/>
+              </a:lnSpc>
+              <a:spcBef>
+                <a:spcPts val="0"/>
+              </a:spcBef>
+              <a:spcAft>
+                <a:spcPts val="0"/>
+              </a:spcAft>
+            </a:pPr>
+            <a:r>
+              <a:rPr sz="800" b="0">
+                <a:solidFill>
+                  <a:srgbClr val="66727F"/>
+                </a:solidFill>
+                <a:latin typeface="Microsoft YaHei"/>
+                <a:ea typeface="Microsoft YaHei"/>
+                <a:cs typeface="Microsoft YaHei"/>
+              </a:rPr>
+              <a:t>+ 路由探针</a:t>
+            </a:r>
+          </a:p>
+        </p:txBody>
+      </p:sp>
+      <p:sp>
+        <p:nvSpPr>
+          <p:cNvPr id="62" name="TextBox 61"/>
+          <p:cNvSpPr txBox="1"/>
+          <p:nvPr/>
+        </p:nvSpPr>
+        <p:spPr>
+          <a:xfrm>
+            <a:off x="4983480" y="2414016"/>
+            <a:ext cx="1691640" cy="475488"/>
+          </a:xfrm>
+          <a:prstGeom prst="rect">
+            <a:avLst/>
+          </a:prstGeom>
+          <a:noFill/>
+        </p:spPr>
+        <p:txBody>
+          <a:bodyPr wrap="square" anchor="ctr" lIns="0" tIns="0" rIns="0" bIns="0">
+            <a:noAutofit/>
+          </a:bodyPr>
+          <a:lstStyle/>
+          <a:p>
+            <a:pPr algn="l" latinLnBrk="0">
+              <a:lnSpc>
+                <a:spcPct val="100000"/>
+              </a:lnSpc>
+              <a:spcBef>
+                <a:spcPts val="0"/>
+              </a:spcBef>
+              <a:spcAft>
+                <a:spcPts val="0"/>
+              </a:spcAft>
+            </a:pPr>
+            <a:r>
+              <a:rPr sz="800" b="0">
+                <a:solidFill>
+                  <a:srgbClr val="66727F"/>
+                </a:solidFill>
+                <a:latin typeface="Microsoft YaHei"/>
+                <a:ea typeface="Microsoft YaHei"/>
+                <a:cs typeface="Microsoft YaHei"/>
+              </a:rPr>
+              <a:t>每类 kernel 时长、调用数</a:t>
+            </a:r>
+          </a:p>
+          <a:p>
+            <a:pPr algn="l" latinLnBrk="0">
+              <a:lnSpc>
+                <a:spcPct val="100000"/>
+              </a:lnSpc>
+              <a:spcBef>
+                <a:spcPts val="0"/>
+              </a:spcBef>
+              <a:spcAft>
+                <a:spcPts val="0"/>
+              </a:spcAft>
+            </a:pPr>
+            <a:r>
+              <a:rPr sz="800" b="0">
+                <a:solidFill>
+                  <a:srgbClr val="66727F"/>
+                </a:solidFill>
+                <a:latin typeface="Microsoft YaHei"/>
+                <a:ea typeface="Microsoft YaHei"/>
+                <a:cs typeface="Microsoft YaHei"/>
+              </a:rPr>
+              <a:t>区间并集与总和</a:t>
+            </a:r>
+          </a:p>
+        </p:txBody>
+      </p:sp>
+      <p:sp>
+        <p:nvSpPr>
+          <p:cNvPr id="63" name="TextBox 62"/>
+          <p:cNvSpPr txBox="1"/>
+          <p:nvPr/>
+        </p:nvSpPr>
+        <p:spPr>
+          <a:xfrm>
+            <a:off x="6720840" y="2414016"/>
+            <a:ext cx="1691640" cy="475488"/>
+          </a:xfrm>
+          <a:prstGeom prst="rect">
+            <a:avLst/>
+          </a:prstGeom>
+          <a:noFill/>
+        </p:spPr>
+        <p:txBody>
+          <a:bodyPr wrap="square" anchor="ctr" lIns="0" tIns="0" rIns="0" bIns="0">
+            <a:noAutofit/>
+          </a:bodyPr>
+          <a:lstStyle/>
+          <a:p>
+            <a:pPr algn="r" latinLnBrk="0">
+              <a:lnSpc>
+                <a:spcPct val="100000"/>
+              </a:lnSpc>
+              <a:spcBef>
+                <a:spcPts val="0"/>
+              </a:spcBef>
+              <a:spcAft>
+                <a:spcPts val="0"/>
+              </a:spcAft>
+            </a:pPr>
+            <a:r>
+              <a:rPr sz="800" b="0">
+                <a:solidFill>
+                  <a:srgbClr val="66727F"/>
+                </a:solidFill>
+                <a:latin typeface="Consolas"/>
+                <a:ea typeface="Microsoft YaHei"/>
+                <a:cs typeface="Microsoft YaHei"/>
+              </a:rPr>
+              <a:t>ranked_targets</a:t>
+            </a:r>
+          </a:p>
+          <a:p>
+            <a:pPr algn="r" latinLnBrk="0">
+              <a:lnSpc>
+                <a:spcPct val="100000"/>
+              </a:lnSpc>
+              <a:spcBef>
+                <a:spcPts val="0"/>
+              </a:spcBef>
+              <a:spcAft>
+                <a:spcPts val="0"/>
+              </a:spcAft>
+            </a:pPr>
+            <a:r>
+              <a:rPr sz="800" b="0">
+                <a:solidFill>
+                  <a:srgbClr val="66727F"/>
+                </a:solidFill>
+                <a:latin typeface="Microsoft YaHei"/>
+                <a:ea typeface="Microsoft YaHei"/>
+                <a:cs typeface="Microsoft YaHei"/>
+              </a:rPr>
+              <a:t>+ 隔离项与原因</a:t>
+            </a:r>
+          </a:p>
+        </p:txBody>
+      </p:sp>
+      <p:sp>
+        <p:nvSpPr>
+          <p:cNvPr id="64" name="TextBox 63"/>
+          <p:cNvSpPr txBox="1"/>
+          <p:nvPr/>
+        </p:nvSpPr>
+        <p:spPr>
+          <a:xfrm>
+            <a:off x="8001000" y="4151376"/>
+            <a:ext cx="2103120" cy="438912"/>
+          </a:xfrm>
+          <a:prstGeom prst="rect">
+            <a:avLst/>
+          </a:prstGeom>
+          <a:noFill/>
+        </p:spPr>
+        <p:txBody>
+          <a:bodyPr wrap="square" anchor="ctr" lIns="0" tIns="0" rIns="0" bIns="0">
+            <a:noAutofit/>
+          </a:bodyPr>
+          <a:lstStyle/>
+          <a:p>
+            <a:pPr algn="r" latinLnBrk="0">
+              <a:lnSpc>
+                <a:spcPct val="100000"/>
+              </a:lnSpc>
+              <a:spcBef>
+                <a:spcPts val="0"/>
+              </a:spcBef>
+              <a:spcAft>
+                <a:spcPts val="0"/>
+              </a:spcAft>
+            </a:pPr>
+            <a:r>
+              <a:rPr sz="800" b="0">
+                <a:solidFill>
+                  <a:srgbClr val="66727F"/>
+                </a:solidFill>
+                <a:latin typeface="Microsoft YaHei"/>
+                <a:ea typeface="Microsoft YaHei"/>
+                <a:cs typeface="Microsoft YaHei"/>
+              </a:rPr>
+              <a:t>提案：假设 + 补丁 + 证据引用</a:t>
+            </a:r>
+          </a:p>
+          <a:p>
+            <a:pPr algn="r" latinLnBrk="0">
+              <a:lnSpc>
+                <a:spcPct val="100000"/>
+              </a:lnSpc>
+              <a:spcBef>
+                <a:spcPts val="0"/>
+              </a:spcBef>
+              <a:spcAft>
+                <a:spcPts val="0"/>
+              </a:spcAft>
+            </a:pPr>
+            <a:r>
+              <a:rPr sz="800" b="0">
+                <a:solidFill>
+                  <a:srgbClr val="66727F"/>
+                </a:solidFill>
+                <a:latin typeface="Microsoft YaHei"/>
+                <a:ea typeface="Microsoft YaHei"/>
+                <a:cs typeface="Microsoft YaHei"/>
+              </a:rPr>
+              <a:t>证据齐备才落地</a:t>
+            </a:r>
+          </a:p>
+        </p:txBody>
+      </p:sp>
+      <p:sp>
+        <p:nvSpPr>
+          <p:cNvPr id="65" name="TextBox 64"/>
+          <p:cNvSpPr txBox="1"/>
+          <p:nvPr/>
+        </p:nvSpPr>
+        <p:spPr>
+          <a:xfrm>
+            <a:off x="7360920" y="4645152"/>
+            <a:ext cx="1783080" cy="402336"/>
+          </a:xfrm>
+          <a:prstGeom prst="rect">
+            <a:avLst/>
+          </a:prstGeom>
+          <a:noFill/>
+        </p:spPr>
+        <p:txBody>
+          <a:bodyPr wrap="square" anchor="ctr" lIns="0" tIns="0" rIns="0" bIns="0">
+            <a:noAutofit/>
+          </a:bodyPr>
+          <a:lstStyle/>
+          <a:p>
+            <a:pPr algn="r" latinLnBrk="0">
+              <a:lnSpc>
+                <a:spcPct val="100000"/>
+              </a:lnSpc>
+              <a:spcBef>
+                <a:spcPts val="0"/>
+              </a:spcBef>
+              <a:spcAft>
+                <a:spcPts val="0"/>
+              </a:spcAft>
+            </a:pPr>
+            <a:r>
+              <a:rPr sz="800" b="0">
+                <a:solidFill>
+                  <a:srgbClr val="66727F"/>
+                </a:solidFill>
+                <a:latin typeface="Microsoft YaHei"/>
+                <a:ea typeface="Microsoft YaHei"/>
+                <a:cs typeface="Microsoft YaHei"/>
+              </a:rPr>
+              <a:t>构建身份一致才比较，否则</a:t>
+            </a:r>
+          </a:p>
+          <a:p>
+            <a:pPr algn="r" latinLnBrk="0">
+              <a:lnSpc>
+                <a:spcPct val="100000"/>
+              </a:lnSpc>
+              <a:spcBef>
+                <a:spcPts val="0"/>
+              </a:spcBef>
+              <a:spcAft>
+                <a:spcPts val="0"/>
+              </a:spcAft>
+            </a:pPr>
+            <a:r>
+              <a:rPr sz="800" b="0">
+                <a:solidFill>
+                  <a:srgbClr val="66727F"/>
+                </a:solidFill>
+                <a:latin typeface="Consolas"/>
+                <a:ea typeface="Microsoft YaHei"/>
+                <a:cs typeface="Microsoft YaHei"/>
+              </a:rPr>
+              <a:t>optimization_retry</a:t>
+            </a:r>
+            <a:r>
+              <a:rPr sz="800" b="0">
+                <a:solidFill>
+                  <a:srgbClr val="66727F"/>
+                </a:solidFill>
+                <a:latin typeface="Microsoft YaHei"/>
+                <a:ea typeface="Microsoft YaHei"/>
+                <a:cs typeface="Microsoft YaHei"/>
+              </a:rPr>
+              <a:t> 重测</a:t>
+            </a:r>
+          </a:p>
+        </p:txBody>
+      </p:sp>
+      <p:sp>
+        <p:nvSpPr>
+          <p:cNvPr id="66" name="TextBox 65"/>
+          <p:cNvSpPr txBox="1"/>
+          <p:nvPr/>
+        </p:nvSpPr>
+        <p:spPr>
+          <a:xfrm>
+            <a:off x="4572000" y="4645152"/>
+            <a:ext cx="1783080" cy="402336"/>
+          </a:xfrm>
+          <a:prstGeom prst="rect">
+            <a:avLst/>
+          </a:prstGeom>
+          <a:noFill/>
+        </p:spPr>
+        <p:txBody>
+          <a:bodyPr wrap="square" anchor="ctr" lIns="0" tIns="0" rIns="0" bIns="0">
+            <a:noAutofit/>
+          </a:bodyPr>
+          <a:lstStyle/>
+          <a:p>
+            <a:pPr algn="r" latinLnBrk="0">
+              <a:lnSpc>
+                <a:spcPct val="100000"/>
+              </a:lnSpc>
+              <a:spcBef>
+                <a:spcPts val="0"/>
+              </a:spcBef>
+              <a:spcAft>
+                <a:spcPts val="0"/>
+              </a:spcAft>
+            </a:pPr>
+            <a:r>
+              <a:rPr sz="800" b="0">
+                <a:solidFill>
+                  <a:srgbClr val="66727F"/>
+                </a:solidFill>
+                <a:latin typeface="Consolas"/>
+                <a:ea typeface="Microsoft YaHei"/>
+                <a:cs typeface="Microsoft YaHei"/>
+              </a:rPr>
+              <a:t>device_screened</a:t>
+            </a:r>
+          </a:p>
+        </p:txBody>
+      </p:sp>
+      <p:sp>
+        <p:nvSpPr>
+          <p:cNvPr id="67" name="TextBox 66"/>
+          <p:cNvSpPr txBox="1"/>
+          <p:nvPr/>
+        </p:nvSpPr>
+        <p:spPr>
+          <a:xfrm>
+            <a:off x="1783080" y="4645152"/>
+            <a:ext cx="1783080" cy="402336"/>
+          </a:xfrm>
+          <a:prstGeom prst="rect">
+            <a:avLst/>
+          </a:prstGeom>
+          <a:noFill/>
+        </p:spPr>
+        <p:txBody>
+          <a:bodyPr wrap="square" anchor="ctr" lIns="0" tIns="0" rIns="0" bIns="0">
+            <a:noAutofit/>
+          </a:bodyPr>
+          <a:lstStyle/>
+          <a:p>
+            <a:pPr algn="r" latinLnBrk="0">
+              <a:lnSpc>
+                <a:spcPct val="100000"/>
+              </a:lnSpc>
+              <a:spcBef>
+                <a:spcPts val="0"/>
+              </a:spcBef>
+              <a:spcAft>
+                <a:spcPts val="0"/>
+              </a:spcAft>
+            </a:pPr>
+            <a:r>
+              <a:rPr sz="800" b="0">
+                <a:solidFill>
+                  <a:srgbClr val="66727F"/>
+                </a:solidFill>
+                <a:latin typeface="Microsoft YaHei"/>
+                <a:ea typeface="Microsoft YaHei"/>
+                <a:cs typeface="Microsoft YaHei"/>
+              </a:rPr>
+              <a:t>进 bundle，三方同库构建</a:t>
+            </a:r>
+          </a:p>
+        </p:txBody>
+      </p:sp>
+      <p:sp>
+        <p:nvSpPr>
+          <p:cNvPr id="68" name="TextBox 67"/>
+          <p:cNvSpPr txBox="1"/>
+          <p:nvPr/>
+        </p:nvSpPr>
+        <p:spPr>
+          <a:xfrm>
+            <a:off x="1874519" y="3218688"/>
+            <a:ext cx="1371600" cy="566928"/>
+          </a:xfrm>
+          <a:prstGeom prst="rect">
+            <a:avLst/>
+          </a:prstGeom>
+          <a:noFill/>
+        </p:spPr>
+        <p:txBody>
+          <a:bodyPr wrap="square" anchor="ctr" lIns="0" tIns="0" rIns="0" bIns="0">
+            <a:noAutofit/>
+          </a:bodyPr>
+          <a:lstStyle/>
+          <a:p>
+            <a:pPr algn="l" latinLnBrk="0">
+              <a:lnSpc>
+                <a:spcPct val="100000"/>
+              </a:lnSpc>
+              <a:spcBef>
+                <a:spcPts val="0"/>
+              </a:spcBef>
+              <a:spcAft>
+                <a:spcPts val="0"/>
+              </a:spcAft>
+            </a:pPr>
+            <a:r>
+              <a:rPr sz="800" b="0">
+                <a:solidFill>
+                  <a:srgbClr val="66727F"/>
+                </a:solidFill>
+                <a:latin typeface="Consolas"/>
+                <a:ea typeface="Microsoft YaHei"/>
+                <a:cs typeface="Microsoft YaHei"/>
+              </a:rPr>
+              <a:t>verified_gain</a:t>
+            </a:r>
+          </a:p>
+          <a:p>
+            <a:pPr algn="l" latinLnBrk="0">
+              <a:lnSpc>
+                <a:spcPct val="100000"/>
+              </a:lnSpc>
+              <a:spcBef>
+                <a:spcPts val="0"/>
+              </a:spcBef>
+              <a:spcAft>
+                <a:spcPts val="0"/>
+              </a:spcAft>
+            </a:pPr>
+            <a:r>
+              <a:rPr sz="800" b="0">
+                <a:solidFill>
+                  <a:srgbClr val="66727F"/>
+                </a:solidFill>
+                <a:latin typeface="Microsoft YaHei"/>
+                <a:ea typeface="Microsoft YaHei"/>
+                <a:cs typeface="Microsoft YaHei"/>
+              </a:rPr>
+              <a:t>→ best 晋升</a:t>
+            </a:r>
+          </a:p>
+          <a:p>
+            <a:pPr algn="l" latinLnBrk="0">
+              <a:lnSpc>
+                <a:spcPct val="100000"/>
+              </a:lnSpc>
+              <a:spcBef>
+                <a:spcPts val="0"/>
+              </a:spcBef>
+              <a:spcAft>
+                <a:spcPts val="0"/>
+              </a:spcAft>
+            </a:pPr>
+            <a:r>
+              <a:rPr sz="800" b="0">
+                <a:solidFill>
+                  <a:srgbClr val="66727F"/>
+                </a:solidFill>
+                <a:latin typeface="Microsoft YaHei"/>
+                <a:ea typeface="Microsoft YaHei"/>
+                <a:cs typeface="Microsoft YaHei"/>
+              </a:rPr>
+              <a:t>→ 再采 trace</a:t>
+            </a:r>
+          </a:p>
+        </p:txBody>
+      </p:sp>
+      <p:sp>
+        <p:nvSpPr>
+          <p:cNvPr id="69" name="Rectangle 68"/>
           <p:cNvSpPr/>
           <p:nvPr/>
         </p:nvSpPr>
         <p:spPr>
           <a:xfrm>
-            <a:off x="1640793" y="4759032"/>
-            <a:ext cx="2286000" cy="950976"/>
+            <a:off x="3291840" y="2944368"/>
+            <a:ext cx="4983480" cy="1627632"/>
           </a:xfrm>
           <a:prstGeom prst="rect">
             <a:avLst/>
           </a:prstGeom>
           <a:solidFill>
-            <a:srgbClr val="FFFFFF"/>
+            <a:srgbClr val="E8EDF7"/>
           </a:solidFill>
-          <a:ln w="9525">
-            <a:solidFill>
-              <a:srgbClr val="C5CCD4"/>
-            </a:solidFill>
+          <a:ln>
+            <a:noFill/>
           </a:ln>
         </p:spPr>
         <p:txBody>
@@ -6746,14 +7158,14 @@
       </p:sp>
       <p:sp>
         <p:nvSpPr>
-          <p:cNvPr id="59" name="Rectangle 58"/>
+          <p:cNvPr id="70" name="Rectangle 69"/>
           <p:cNvSpPr/>
           <p:nvPr/>
         </p:nvSpPr>
         <p:spPr>
           <a:xfrm>
-            <a:off x="1640793" y="4759032"/>
-            <a:ext cx="54864" cy="950976"/>
+            <a:off x="3291840" y="2944368"/>
+            <a:ext cx="4983480" cy="45720"/>
           </a:xfrm>
           <a:prstGeom prst="rect">
             <a:avLst/>
@@ -6775,14 +7187,14 @@
       </p:sp>
       <p:sp>
         <p:nvSpPr>
-          <p:cNvPr id="60" name="TextBox 59"/>
+          <p:cNvPr id="71" name="TextBox 70"/>
           <p:cNvSpPr txBox="1"/>
           <p:nvPr/>
         </p:nvSpPr>
         <p:spPr>
           <a:xfrm>
-            <a:off x="1787097" y="4795608"/>
-            <a:ext cx="2048256" cy="877824"/>
+            <a:off x="3474720" y="3035808"/>
+            <a:ext cx="4617720" cy="1463040"/>
           </a:xfrm>
           <a:prstGeom prst="rect">
             <a:avLst/>
@@ -6790,890 +7202,6 @@
           <a:noFill/>
         </p:spPr>
         <p:txBody>
-          <a:bodyPr wrap="square" anchor="ctr" lIns="0" tIns="0" rIns="0" bIns="0">
-            <a:noAutofit/>
-          </a:bodyPr>
-          <a:lstStyle/>
-          <a:p>
-            <a:pPr algn="l" latinLnBrk="0">
-              <a:lnSpc>
-                <a:spcPct val="100000"/>
-              </a:lnSpc>
-              <a:spcBef>
-                <a:spcPts val="0"/>
-              </a:spcBef>
-              <a:spcAft>
-                <a:spcPts val="100"/>
-              </a:spcAft>
-            </a:pPr>
-            <a:r>
-              <a:rPr sz="1050" b="1">
-                <a:solidFill>
-                  <a:srgbClr val="3F63A8"/>
-                </a:solidFill>
-                <a:latin typeface="Arial"/>
-                <a:ea typeface="Microsoft YaHei"/>
-                <a:cs typeface="Microsoft YaHei"/>
-              </a:rPr>
-              <a:t>9 </a:t>
-            </a:r>
-            <a:r>
-              <a:rPr sz="1050" b="1">
-                <a:solidFill>
-                  <a:srgbClr val="16202A"/>
-                </a:solidFill>
-                <a:latin typeface="Microsoft YaHei"/>
-                <a:ea typeface="Microsoft YaHei"/>
-                <a:cs typeface="Microsoft YaHei"/>
-              </a:rPr>
-              <a:t>D 三方 A/B</a:t>
-            </a:r>
-          </a:p>
-          <a:p>
-            <a:pPr algn="l" latinLnBrk="0">
-              <a:lnSpc>
-                <a:spcPct val="100000"/>
-              </a:lnSpc>
-              <a:spcBef>
-                <a:spcPts val="0"/>
-              </a:spcBef>
-              <a:spcAft>
-                <a:spcPts val="0"/>
-              </a:spcAft>
-            </a:pPr>
-            <a:r>
-              <a:rPr sz="750" b="0">
-                <a:solidFill>
-                  <a:srgbClr val="66727F"/>
-                </a:solidFill>
-                <a:latin typeface="Consolas"/>
-                <a:ea typeface="Microsoft YaHei"/>
-                <a:cs typeface="Microsoft YaHei"/>
-              </a:rPr>
-              <a:t>optimization_staging · benchmark</a:t>
-            </a:r>
-          </a:p>
-          <a:p>
-            <a:pPr algn="l" latinLnBrk="0">
-              <a:lnSpc>
-                <a:spcPct val="100000"/>
-              </a:lnSpc>
-              <a:spcBef>
-                <a:spcPts val="0"/>
-              </a:spcBef>
-              <a:spcAft>
-                <a:spcPts val="200"/>
-              </a:spcAft>
-            </a:pPr>
-            <a:r>
-              <a:rPr sz="750" b="0">
-                <a:solidFill>
-                  <a:srgbClr val="66727F"/>
-                </a:solidFill>
-                <a:latin typeface="Consolas"/>
-                <a:ea typeface="Microsoft YaHei"/>
-                <a:cs typeface="Microsoft YaHei"/>
-              </a:rPr>
-              <a:t>selfiterate_gates</a:t>
-            </a:r>
-          </a:p>
-          <a:p>
-            <a:pPr algn="l" latinLnBrk="0">
-              <a:lnSpc>
-                <a:spcPct val="100000"/>
-              </a:lnSpc>
-              <a:spcBef>
-                <a:spcPts val="0"/>
-              </a:spcBef>
-              <a:spcAft>
-                <a:spcPts val="0"/>
-              </a:spcAft>
-            </a:pPr>
-            <a:r>
-              <a:rPr sz="850" b="0">
-                <a:solidFill>
-                  <a:srgbClr val="35424F"/>
-                </a:solidFill>
-                <a:latin typeface="Microsoft YaHei"/>
-                <a:ea typeface="Microsoft YaHei"/>
-                <a:cs typeface="Microsoft YaHei"/>
-              </a:rPr>
-              <a:t>原始 / 上一版 / 候选共用加载库 SHA</a:t>
-            </a:r>
-          </a:p>
-          <a:p>
-            <a:pPr algn="l" latinLnBrk="0">
-              <a:lnSpc>
-                <a:spcPct val="100000"/>
-              </a:lnSpc>
-              <a:spcBef>
-                <a:spcPts val="0"/>
-              </a:spcBef>
-              <a:spcAft>
-                <a:spcPts val="0"/>
-              </a:spcAft>
-            </a:pPr>
-            <a:r>
-              <a:rPr sz="850" b="0">
-                <a:solidFill>
-                  <a:srgbClr val="35424F"/>
-                </a:solidFill>
-                <a:latin typeface="Microsoft YaHei"/>
-                <a:ea typeface="Microsoft YaHei"/>
-                <a:cs typeface="Microsoft YaHei"/>
-              </a:rPr>
-              <a:t>各 3 次取中位，关 profiler，过噪声门</a:t>
-            </a:r>
-          </a:p>
-          <a:p>
-            <a:pPr algn="l" latinLnBrk="0">
-              <a:lnSpc>
-                <a:spcPct val="100000"/>
-              </a:lnSpc>
-              <a:spcBef>
-                <a:spcPts val="0"/>
-              </a:spcBef>
-              <a:spcAft>
-                <a:spcPts val="0"/>
-              </a:spcAft>
-            </a:pPr>
-            <a:r>
-              <a:rPr sz="850" b="1">
-                <a:solidFill>
-                  <a:srgbClr val="3F63A8"/>
-                </a:solidFill>
-                <a:latin typeface="Microsoft YaHei"/>
-                <a:ea typeface="Microsoft YaHei"/>
-                <a:cs typeface="Microsoft YaHei"/>
-              </a:rPr>
-              <a:t>本轮 </a:t>
-            </a:r>
-            <a:r>
-              <a:rPr sz="850" b="0">
-                <a:solidFill>
-                  <a:srgbClr val="16202A"/>
-                </a:solidFill>
-                <a:latin typeface="Microsoft YaHei"/>
-                <a:ea typeface="Microsoft YaHei"/>
-                <a:cs typeface="Microsoft YaHei"/>
-              </a:rPr>
-              <a:t>3 轮都过；034 c32 +45.61%</a:t>
-            </a:r>
-          </a:p>
-        </p:txBody>
-      </p:sp>
-      <p:sp>
-        <p:nvSpPr>
-          <p:cNvPr id="61" name="TextBox 60"/>
-          <p:cNvSpPr txBox="1"/>
-          <p:nvPr/>
-        </p:nvSpPr>
-        <p:spPr>
-          <a:xfrm>
-            <a:off x="2331720" y="2871216"/>
-            <a:ext cx="1691640" cy="402336"/>
-          </a:xfrm>
-          <a:prstGeom prst="rect">
-            <a:avLst/>
-          </a:prstGeom>
-          <a:noFill/>
-        </p:spPr>
-        <p:txBody>
-          <a:bodyPr wrap="square" anchor="ctr" lIns="0" tIns="0" rIns="0" bIns="0">
-            <a:noAutofit/>
-          </a:bodyPr>
-          <a:lstStyle/>
-          <a:p>
-            <a:pPr algn="l" latinLnBrk="0">
-              <a:lnSpc>
-                <a:spcPct val="100000"/>
-              </a:lnSpc>
-              <a:spcBef>
-                <a:spcPts val="0"/>
-              </a:spcBef>
-              <a:spcAft>
-                <a:spcPts val="0"/>
-              </a:spcAft>
-            </a:pPr>
-            <a:r>
-              <a:rPr sz="800" b="0">
-                <a:solidFill>
-                  <a:srgbClr val="66727F"/>
-                </a:solidFill>
-                <a:latin typeface="Microsoft YaHei"/>
-                <a:ea typeface="Microsoft YaHei"/>
-                <a:cs typeface="Microsoft YaHei"/>
-              </a:rPr>
-              <a:t>Chrome trace</a:t>
-            </a:r>
-          </a:p>
-          <a:p>
-            <a:pPr algn="l" latinLnBrk="0">
-              <a:lnSpc>
-                <a:spcPct val="100000"/>
-              </a:lnSpc>
-              <a:spcBef>
-                <a:spcPts val="0"/>
-              </a:spcBef>
-              <a:spcAft>
-                <a:spcPts val="0"/>
-              </a:spcAft>
-            </a:pPr>
-            <a:r>
-              <a:rPr sz="800" b="0">
-                <a:solidFill>
-                  <a:srgbClr val="66727F"/>
-                </a:solidFill>
-                <a:latin typeface="Microsoft YaHei"/>
-                <a:ea typeface="Microsoft YaHei"/>
-                <a:cs typeface="Microsoft YaHei"/>
-              </a:rPr>
-              <a:t>+ 路由探针</a:t>
-            </a:r>
-          </a:p>
-        </p:txBody>
-      </p:sp>
-      <p:sp>
-        <p:nvSpPr>
-          <p:cNvPr id="62" name="TextBox 61"/>
-          <p:cNvSpPr txBox="1"/>
-          <p:nvPr/>
-        </p:nvSpPr>
-        <p:spPr>
-          <a:xfrm>
-            <a:off x="3986784" y="2139696"/>
-            <a:ext cx="1737360" cy="329184"/>
-          </a:xfrm>
-          <a:prstGeom prst="rect">
-            <a:avLst/>
-          </a:prstGeom>
-          <a:noFill/>
-        </p:spPr>
-        <p:txBody>
-          <a:bodyPr wrap="square" anchor="ctr" lIns="0" tIns="0" rIns="0" bIns="0">
-            <a:noAutofit/>
-          </a:bodyPr>
-          <a:lstStyle/>
-          <a:p>
-            <a:pPr algn="l" latinLnBrk="0">
-              <a:lnSpc>
-                <a:spcPct val="100000"/>
-              </a:lnSpc>
-              <a:spcBef>
-                <a:spcPts val="0"/>
-              </a:spcBef>
-              <a:spcAft>
-                <a:spcPts val="0"/>
-              </a:spcAft>
-            </a:pPr>
-            <a:r>
-              <a:rPr sz="800" b="0">
-                <a:solidFill>
-                  <a:srgbClr val="66727F"/>
-                </a:solidFill>
-                <a:latin typeface="Microsoft YaHei"/>
-                <a:ea typeface="Microsoft YaHei"/>
-                <a:cs typeface="Microsoft YaHei"/>
-              </a:rPr>
-              <a:t>每类 kernel 时长、调用数</a:t>
-            </a:r>
-          </a:p>
-          <a:p>
-            <a:pPr algn="l" latinLnBrk="0">
-              <a:lnSpc>
-                <a:spcPct val="100000"/>
-              </a:lnSpc>
-              <a:spcBef>
-                <a:spcPts val="0"/>
-              </a:spcBef>
-              <a:spcAft>
-                <a:spcPts val="0"/>
-              </a:spcAft>
-            </a:pPr>
-            <a:r>
-              <a:rPr sz="800" b="0">
-                <a:solidFill>
-                  <a:srgbClr val="66727F"/>
-                </a:solidFill>
-                <a:latin typeface="Microsoft YaHei"/>
-                <a:ea typeface="Microsoft YaHei"/>
-                <a:cs typeface="Microsoft YaHei"/>
-              </a:rPr>
-              <a:t>区间并集与总和</a:t>
-            </a:r>
-          </a:p>
-        </p:txBody>
-      </p:sp>
-      <p:sp>
-        <p:nvSpPr>
-          <p:cNvPr id="63" name="TextBox 62"/>
-          <p:cNvSpPr txBox="1"/>
-          <p:nvPr/>
-        </p:nvSpPr>
-        <p:spPr>
-          <a:xfrm>
-            <a:off x="5760720" y="2139696"/>
-            <a:ext cx="1207008" cy="329184"/>
-          </a:xfrm>
-          <a:prstGeom prst="rect">
-            <a:avLst/>
-          </a:prstGeom>
-          <a:noFill/>
-        </p:spPr>
-        <p:txBody>
-          <a:bodyPr wrap="square" anchor="ctr" lIns="0" tIns="0" rIns="0" bIns="0">
-            <a:noAutofit/>
-          </a:bodyPr>
-          <a:lstStyle/>
-          <a:p>
-            <a:pPr algn="r" latinLnBrk="0">
-              <a:lnSpc>
-                <a:spcPct val="100000"/>
-              </a:lnSpc>
-              <a:spcBef>
-                <a:spcPts val="0"/>
-              </a:spcBef>
-              <a:spcAft>
-                <a:spcPts val="0"/>
-              </a:spcAft>
-            </a:pPr>
-            <a:r>
-              <a:rPr sz="800" b="0">
-                <a:solidFill>
-                  <a:srgbClr val="66727F"/>
-                </a:solidFill>
-                <a:latin typeface="Consolas"/>
-                <a:ea typeface="Microsoft YaHei"/>
-                <a:cs typeface="Microsoft YaHei"/>
-              </a:rPr>
-              <a:t>ranked_targets</a:t>
-            </a:r>
-          </a:p>
-          <a:p>
-            <a:pPr algn="r" latinLnBrk="0">
-              <a:lnSpc>
-                <a:spcPct val="100000"/>
-              </a:lnSpc>
-              <a:spcBef>
-                <a:spcPts val="0"/>
-              </a:spcBef>
-              <a:spcAft>
-                <a:spcPts val="0"/>
-              </a:spcAft>
-            </a:pPr>
-            <a:r>
-              <a:rPr sz="800" b="0">
-                <a:solidFill>
-                  <a:srgbClr val="66727F"/>
-                </a:solidFill>
-                <a:latin typeface="Microsoft YaHei"/>
-                <a:ea typeface="Microsoft YaHei"/>
-                <a:cs typeface="Microsoft YaHei"/>
-              </a:rPr>
-              <a:t>+ 隔离项与原因</a:t>
-            </a:r>
-          </a:p>
-        </p:txBody>
-      </p:sp>
-      <p:sp>
-        <p:nvSpPr>
-          <p:cNvPr id="64" name="TextBox 63"/>
-          <p:cNvSpPr txBox="1"/>
-          <p:nvPr/>
-        </p:nvSpPr>
-        <p:spPr>
-          <a:xfrm>
-            <a:off x="7498079" y="2377440"/>
-            <a:ext cx="1600200" cy="329184"/>
-          </a:xfrm>
-          <a:prstGeom prst="rect">
-            <a:avLst/>
-          </a:prstGeom>
-          <a:noFill/>
-        </p:spPr>
-        <p:txBody>
-          <a:bodyPr wrap="square" anchor="ctr" lIns="0" tIns="0" rIns="0" bIns="0">
-            <a:noAutofit/>
-          </a:bodyPr>
-          <a:lstStyle/>
-          <a:p>
-            <a:pPr algn="r" latinLnBrk="0">
-              <a:lnSpc>
-                <a:spcPct val="100000"/>
-              </a:lnSpc>
-              <a:spcBef>
-                <a:spcPts val="0"/>
-              </a:spcBef>
-              <a:spcAft>
-                <a:spcPts val="0"/>
-              </a:spcAft>
-            </a:pPr>
-            <a:r>
-              <a:rPr sz="800" b="0">
-                <a:solidFill>
-                  <a:srgbClr val="66727F"/>
-                </a:solidFill>
-                <a:latin typeface="Microsoft YaHei"/>
-                <a:ea typeface="Microsoft YaHei"/>
-                <a:cs typeface="Microsoft YaHei"/>
-              </a:rPr>
-              <a:t>请求 ⇄ 回复</a:t>
-            </a:r>
-          </a:p>
-          <a:p>
-            <a:pPr algn="r" latinLnBrk="0">
-              <a:lnSpc>
-                <a:spcPct val="100000"/>
-              </a:lnSpc>
-              <a:spcBef>
-                <a:spcPts val="0"/>
-              </a:spcBef>
-              <a:spcAft>
-                <a:spcPts val="0"/>
-              </a:spcAft>
-            </a:pPr>
-            <a:r>
-              <a:rPr sz="800" b="0">
-                <a:solidFill>
-                  <a:srgbClr val="66727F"/>
-                </a:solidFill>
-                <a:latin typeface="Microsoft YaHei"/>
-                <a:ea typeface="Microsoft YaHei"/>
-                <a:cs typeface="Microsoft YaHei"/>
-              </a:rPr>
-              <a:t>ID / SHA 不匹配即拒收</a:t>
-            </a:r>
-          </a:p>
-        </p:txBody>
-      </p:sp>
-      <p:sp>
-        <p:nvSpPr>
-          <p:cNvPr id="65" name="TextBox 64"/>
-          <p:cNvSpPr txBox="1"/>
-          <p:nvPr/>
-        </p:nvSpPr>
-        <p:spPr>
-          <a:xfrm>
-            <a:off x="8183879" y="3648456"/>
-            <a:ext cx="2103120" cy="292608"/>
-          </a:xfrm>
-          <a:prstGeom prst="rect">
-            <a:avLst/>
-          </a:prstGeom>
-          <a:noFill/>
-        </p:spPr>
-        <p:txBody>
-          <a:bodyPr wrap="square" anchor="ctr" lIns="0" tIns="0" rIns="0" bIns="0">
-            <a:noAutofit/>
-          </a:bodyPr>
-          <a:lstStyle/>
-          <a:p>
-            <a:pPr algn="r" latinLnBrk="0">
-              <a:lnSpc>
-                <a:spcPct val="100000"/>
-              </a:lnSpc>
-              <a:spcBef>
-                <a:spcPts val="0"/>
-              </a:spcBef>
-              <a:spcAft>
-                <a:spcPts val="0"/>
-              </a:spcAft>
-            </a:pPr>
-            <a:r>
-              <a:rPr sz="800" b="0">
-                <a:solidFill>
-                  <a:srgbClr val="66727F"/>
-                </a:solidFill>
-                <a:latin typeface="Microsoft YaHei"/>
-                <a:ea typeface="Microsoft YaHei"/>
-                <a:cs typeface="Microsoft YaHei"/>
-              </a:rPr>
-              <a:t>提案：假设 + 补丁 + 证据引用</a:t>
-            </a:r>
-          </a:p>
-          <a:p>
-            <a:pPr algn="r" latinLnBrk="0">
-              <a:lnSpc>
-                <a:spcPct val="100000"/>
-              </a:lnSpc>
-              <a:spcBef>
-                <a:spcPts val="0"/>
-              </a:spcBef>
-              <a:spcAft>
-                <a:spcPts val="0"/>
-              </a:spcAft>
-            </a:pPr>
-            <a:r>
-              <a:rPr sz="800" b="0">
-                <a:solidFill>
-                  <a:srgbClr val="66727F"/>
-                </a:solidFill>
-                <a:latin typeface="Microsoft YaHei"/>
-                <a:ea typeface="Microsoft YaHei"/>
-                <a:cs typeface="Microsoft YaHei"/>
-              </a:rPr>
-              <a:t>证据齐备才落地</a:t>
-            </a:r>
-          </a:p>
-        </p:txBody>
-      </p:sp>
-      <p:sp>
-        <p:nvSpPr>
-          <p:cNvPr id="66" name="TextBox 65"/>
-          <p:cNvSpPr txBox="1"/>
-          <p:nvPr/>
-        </p:nvSpPr>
-        <p:spPr>
-          <a:xfrm>
-            <a:off x="7315200" y="4892040"/>
-            <a:ext cx="1783080" cy="329184"/>
-          </a:xfrm>
-          <a:prstGeom prst="rect">
-            <a:avLst/>
-          </a:prstGeom>
-          <a:noFill/>
-        </p:spPr>
-        <p:txBody>
-          <a:bodyPr wrap="square" anchor="ctr" lIns="0" tIns="0" rIns="0" bIns="0">
-            <a:noAutofit/>
-          </a:bodyPr>
-          <a:lstStyle/>
-          <a:p>
-            <a:pPr algn="r" latinLnBrk="0">
-              <a:lnSpc>
-                <a:spcPct val="100000"/>
-              </a:lnSpc>
-              <a:spcBef>
-                <a:spcPts val="0"/>
-              </a:spcBef>
-              <a:spcAft>
-                <a:spcPts val="0"/>
-              </a:spcAft>
-            </a:pPr>
-            <a:r>
-              <a:rPr sz="800" b="0">
-                <a:solidFill>
-                  <a:srgbClr val="66727F"/>
-                </a:solidFill>
-                <a:latin typeface="Microsoft YaHei"/>
-                <a:ea typeface="Microsoft YaHei"/>
-                <a:cs typeface="Microsoft YaHei"/>
-              </a:rPr>
-              <a:t>构建身份一致才进入比较</a:t>
-            </a:r>
-          </a:p>
-          <a:p>
-            <a:pPr algn="r" latinLnBrk="0">
-              <a:lnSpc>
-                <a:spcPct val="100000"/>
-              </a:lnSpc>
-              <a:spcBef>
-                <a:spcPts val="0"/>
-              </a:spcBef>
-              <a:spcAft>
-                <a:spcPts val="0"/>
-              </a:spcAft>
-            </a:pPr>
-            <a:r>
-              <a:rPr sz="800" b="0">
-                <a:solidFill>
-                  <a:srgbClr val="66727F"/>
-                </a:solidFill>
-                <a:latin typeface="Microsoft YaHei"/>
-                <a:ea typeface="Microsoft YaHei"/>
-                <a:cs typeface="Microsoft YaHei"/>
-              </a:rPr>
-              <a:t>否则 </a:t>
-            </a:r>
-            <a:r>
-              <a:rPr sz="800" b="0">
-                <a:solidFill>
-                  <a:srgbClr val="66727F"/>
-                </a:solidFill>
-                <a:latin typeface="Consolas"/>
-                <a:ea typeface="Microsoft YaHei"/>
-                <a:cs typeface="Microsoft YaHei"/>
-              </a:rPr>
-              <a:t>optimization_retry</a:t>
-            </a:r>
-            <a:r>
-              <a:rPr sz="800" b="0">
-                <a:solidFill>
-                  <a:srgbClr val="66727F"/>
-                </a:solidFill>
-                <a:latin typeface="Microsoft YaHei"/>
-                <a:ea typeface="Microsoft YaHei"/>
-                <a:cs typeface="Microsoft YaHei"/>
-              </a:rPr>
-              <a:t> 重测</a:t>
-            </a:r>
-          </a:p>
-        </p:txBody>
-      </p:sp>
-      <p:sp>
-        <p:nvSpPr>
-          <p:cNvPr id="67" name="TextBox 66"/>
-          <p:cNvSpPr txBox="1"/>
-          <p:nvPr/>
-        </p:nvSpPr>
-        <p:spPr>
-          <a:xfrm>
-            <a:off x="5760720" y="5120640"/>
-            <a:ext cx="1207008" cy="329184"/>
-          </a:xfrm>
-          <a:prstGeom prst="rect">
-            <a:avLst/>
-          </a:prstGeom>
-          <a:noFill/>
-        </p:spPr>
-        <p:txBody>
-          <a:bodyPr wrap="square" anchor="ctr" lIns="0" tIns="0" rIns="0" bIns="0">
-            <a:noAutofit/>
-          </a:bodyPr>
-          <a:lstStyle/>
-          <a:p>
-            <a:pPr algn="r" latinLnBrk="0">
-              <a:lnSpc>
-                <a:spcPct val="100000"/>
-              </a:lnSpc>
-              <a:spcBef>
-                <a:spcPts val="0"/>
-              </a:spcBef>
-              <a:spcAft>
-                <a:spcPts val="0"/>
-              </a:spcAft>
-            </a:pPr>
-            <a:r>
-              <a:rPr sz="800" b="0">
-                <a:solidFill>
-                  <a:srgbClr val="66727F"/>
-                </a:solidFill>
-                <a:latin typeface="Consolas"/>
-                <a:ea typeface="Microsoft YaHei"/>
-                <a:cs typeface="Microsoft YaHei"/>
-              </a:rPr>
-              <a:t>device_screened</a:t>
-            </a:r>
-          </a:p>
-        </p:txBody>
-      </p:sp>
-      <p:sp>
-        <p:nvSpPr>
-          <p:cNvPr id="68" name="TextBox 67"/>
-          <p:cNvSpPr txBox="1"/>
-          <p:nvPr/>
-        </p:nvSpPr>
-        <p:spPr>
-          <a:xfrm>
-            <a:off x="3986784" y="5120640"/>
-            <a:ext cx="1737360" cy="329184"/>
-          </a:xfrm>
-          <a:prstGeom prst="rect">
-            <a:avLst/>
-          </a:prstGeom>
-          <a:noFill/>
-        </p:spPr>
-        <p:txBody>
-          <a:bodyPr wrap="square" anchor="ctr" lIns="0" tIns="0" rIns="0" bIns="0">
-            <a:noAutofit/>
-          </a:bodyPr>
-          <a:lstStyle/>
-          <a:p>
-            <a:pPr algn="l" latinLnBrk="0">
-              <a:lnSpc>
-                <a:spcPct val="100000"/>
-              </a:lnSpc>
-              <a:spcBef>
-                <a:spcPts val="0"/>
-              </a:spcBef>
-              <a:spcAft>
-                <a:spcPts val="0"/>
-              </a:spcAft>
-            </a:pPr>
-            <a:r>
-              <a:rPr sz="800" b="0">
-                <a:solidFill>
-                  <a:srgbClr val="66727F"/>
-                </a:solidFill>
-                <a:latin typeface="Microsoft YaHei"/>
-                <a:ea typeface="Microsoft YaHei"/>
-                <a:cs typeface="Microsoft YaHei"/>
-              </a:rPr>
-              <a:t>进 bundle</a:t>
-            </a:r>
-          </a:p>
-          <a:p>
-            <a:pPr algn="l" latinLnBrk="0">
-              <a:lnSpc>
-                <a:spcPct val="100000"/>
-              </a:lnSpc>
-              <a:spcBef>
-                <a:spcPts val="0"/>
-              </a:spcBef>
-              <a:spcAft>
-                <a:spcPts val="0"/>
-              </a:spcAft>
-            </a:pPr>
-            <a:r>
-              <a:rPr sz="800" b="0">
-                <a:solidFill>
-                  <a:srgbClr val="66727F"/>
-                </a:solidFill>
-                <a:latin typeface="Microsoft YaHei"/>
-                <a:ea typeface="Microsoft YaHei"/>
-                <a:cs typeface="Microsoft YaHei"/>
-              </a:rPr>
-              <a:t>三方同库构建，本轮 8 次</a:t>
-            </a:r>
-          </a:p>
-        </p:txBody>
-      </p:sp>
-      <p:sp>
-        <p:nvSpPr>
-          <p:cNvPr id="69" name="TextBox 68"/>
-          <p:cNvSpPr txBox="1"/>
-          <p:nvPr/>
-        </p:nvSpPr>
-        <p:spPr>
-          <a:xfrm>
-            <a:off x="2331720" y="4315968"/>
-            <a:ext cx="1691640" cy="402336"/>
-          </a:xfrm>
-          <a:prstGeom prst="rect">
-            <a:avLst/>
-          </a:prstGeom>
-          <a:noFill/>
-        </p:spPr>
-        <p:txBody>
-          <a:bodyPr wrap="square" anchor="ctr" lIns="0" tIns="0" rIns="0" bIns="0">
-            <a:noAutofit/>
-          </a:bodyPr>
-          <a:lstStyle/>
-          <a:p>
-            <a:pPr algn="l" latinLnBrk="0">
-              <a:lnSpc>
-                <a:spcPct val="100000"/>
-              </a:lnSpc>
-              <a:spcBef>
-                <a:spcPts val="0"/>
-              </a:spcBef>
-              <a:spcAft>
-                <a:spcPts val="0"/>
-              </a:spcAft>
-            </a:pPr>
-            <a:r>
-              <a:rPr sz="800" b="0">
-                <a:solidFill>
-                  <a:srgbClr val="66727F"/>
-                </a:solidFill>
-                <a:latin typeface="Consolas"/>
-                <a:ea typeface="Microsoft YaHei"/>
-                <a:cs typeface="Microsoft YaHei"/>
-              </a:rPr>
-              <a:t>verified_gain</a:t>
-            </a:r>
-          </a:p>
-          <a:p>
-            <a:pPr algn="l" latinLnBrk="0">
-              <a:lnSpc>
-                <a:spcPct val="100000"/>
-              </a:lnSpc>
-              <a:spcBef>
-                <a:spcPts val="0"/>
-              </a:spcBef>
-              <a:spcAft>
-                <a:spcPts val="0"/>
-              </a:spcAft>
-            </a:pPr>
-            <a:r>
-              <a:rPr sz="800" b="0">
-                <a:solidFill>
-                  <a:srgbClr val="66727F"/>
-                </a:solidFill>
-                <a:latin typeface="Microsoft YaHei"/>
-                <a:ea typeface="Microsoft YaHei"/>
-                <a:cs typeface="Microsoft YaHei"/>
-              </a:rPr>
-              <a:t>→ best 晋升 → 再采 trace</a:t>
-            </a:r>
-          </a:p>
-        </p:txBody>
-      </p:sp>
-      <p:sp>
-        <p:nvSpPr>
-          <p:cNvPr id="70" name="Rectangle 69"/>
-          <p:cNvSpPr/>
-          <p:nvPr/>
-        </p:nvSpPr>
-        <p:spPr>
-          <a:xfrm>
-            <a:off x="4069080" y="2788920"/>
-            <a:ext cx="4069080" cy="2039112"/>
-          </a:xfrm>
-          <a:prstGeom prst="rect">
-            <a:avLst/>
-          </a:prstGeom>
-          <a:solidFill>
-            <a:srgbClr val="E8EDF7"/>
-          </a:solidFill>
-          <a:ln>
-            <a:noFill/>
-          </a:ln>
-        </p:spPr>
-        <p:txBody>
-          <a:bodyPr rtlCol="0" anchor="ctr"/>
-          <a:lstStyle/>
-          <a:p>
-            <a:pPr algn="ctr"/>
-          </a:p>
-        </p:txBody>
-      </p:sp>
-      <p:sp>
-        <p:nvSpPr>
-          <p:cNvPr id="71" name="Rectangle 70"/>
-          <p:cNvSpPr/>
-          <p:nvPr/>
-        </p:nvSpPr>
-        <p:spPr>
-          <a:xfrm>
-            <a:off x="4069080" y="2788920"/>
-            <a:ext cx="4069080" cy="45720"/>
-          </a:xfrm>
-          <a:prstGeom prst="rect">
-            <a:avLst/>
-          </a:prstGeom>
-          <a:solidFill>
-            <a:srgbClr val="3F63A8"/>
-          </a:solidFill>
-          <a:ln>
-            <a:noFill/>
-          </a:ln>
-        </p:spPr>
-        <p:txBody>
-          <a:bodyPr rtlCol="0" anchor="ctr"/>
-          <a:lstStyle/>
-          <a:p>
-            <a:pPr algn="ctr"/>
-          </a:p>
-        </p:txBody>
-      </p:sp>
-      <p:sp>
-        <p:nvSpPr>
-          <p:cNvPr id="72" name="TextBox 71"/>
-          <p:cNvSpPr txBox="1"/>
-          <p:nvPr/>
-        </p:nvSpPr>
-        <p:spPr>
-          <a:xfrm>
-            <a:off x="4251960" y="2898648"/>
-            <a:ext cx="3703320" cy="1856231"/>
-          </a:xfrm>
-          <a:prstGeom prst="rect">
-            <a:avLst/>
-          </a:prstGeom>
-          <a:noFill/>
-        </p:spPr>
-        <p:txBody>
           <a:bodyPr wrap="square" anchor="t" lIns="0" tIns="0" rIns="0" bIns="0">
             <a:noAutofit/>
           </a:bodyPr>
@@ -7747,7 +7275,7 @@
                 <a:ea typeface="Microsoft YaHei"/>
                 <a:cs typeface="Microsoft YaHei"/>
               </a:rPr>
-              <a:t>Python，确定性：设备锁、状态机、恢复、验证、报告</a:t>
+              <a:t>Python，确定性：设备锁、状态机、失败恢复、验证、报告</a:t>
             </a:r>
           </a:p>
           <a:p>
@@ -7798,17 +7326,6 @@
               </a:spcAft>
             </a:pPr>
             <a:r>
-              <a:rPr sz="850" b="1">
-                <a:solidFill>
-                  <a:srgbClr val="3F63A8"/>
-                </a:solidFill>
-                <a:latin typeface="Microsoft YaHei"/>
-                <a:ea typeface="Microsoft YaHei"/>
-                <a:cs typeface="Microsoft YaHei"/>
-              </a:rPr>
-              <a:t>本轮 </a:t>
-            </a:r>
-            <a:r>
               <a:rPr sz="850" b="0">
                 <a:solidFill>
                   <a:srgbClr val="35424F"/>
@@ -7817,7 +7334,7 @@
                 <a:ea typeface="Microsoft YaHei"/>
                 <a:cs typeface="Microsoft YaHei"/>
               </a:rPr>
-              <a:t>35 条 trial：candidate 16（含 6 次 retry）· 构建准备 8</a:t>
+              <a:t>每次尝试按 trial 落盘：候选、构建准备、基线、基线复核、最终复验</a:t>
             </a:r>
           </a:p>
           <a:p>
@@ -7841,55 +7358,7 @@
                 <a:ea typeface="Microsoft YaHei"/>
                 <a:cs typeface="Microsoft YaHei"/>
               </a:rPr>
-              <a:t>baseline 1 · baseline-recheck 7 · verification 3</a:t>
-            </a:r>
-          </a:p>
-          <a:p>
-            <a:pPr algn="l" latinLnBrk="0">
-              <a:lnSpc>
-                <a:spcPct val="100000"/>
-              </a:lnSpc>
-              <a:spcBef>
-                <a:spcPts val="0"/>
-              </a:spcBef>
-              <a:spcAft>
-                <a:spcPts val="0"/>
-              </a:spcAft>
-            </a:pPr>
-            <a:r>
-              <a:rPr sz="850" b="0">
-                <a:solidFill>
-                  <a:srgbClr val="35424F"/>
-                </a:solidFill>
-                <a:latin typeface="Microsoft YaHei"/>
-                <a:ea typeface="Microsoft YaHei"/>
-                <a:cs typeface="Microsoft YaHei"/>
-              </a:rPr>
-              <a:t>候选尝试累计 25 次：新主线 16 + 旧主线 9</a:t>
-            </a:r>
-          </a:p>
-          <a:p>
-            <a:pPr algn="l" latinLnBrk="0">
-              <a:lnSpc>
-                <a:spcPct val="100000"/>
-              </a:lnSpc>
-              <a:spcBef>
-                <a:spcPts val="400"/>
-              </a:spcBef>
-              <a:spcAft>
-                <a:spcPts val="0"/>
-              </a:spcAft>
-            </a:pPr>
-            <a:r>
-              <a:rPr sz="900" b="0">
-                <a:solidFill>
-                  <a:srgbClr val="35424F"/>
-                </a:solidFill>
-                <a:latin typeface="Microsoft YaHei"/>
-                <a:ea typeface="Microsoft YaHei"/>
-                <a:cs typeface="Microsoft YaHei"/>
-              </a:rPr>
-              <a:t>拒绝原因经 planner_memory 带回下一轮请求；基础设施中断不记成优化无效</a:t>
+              <a:t>拒绝原因经 planner_memory 带回下一轮请求；基础设施中断不计入方案失败</a:t>
             </a:r>
           </a:p>
         </p:txBody>
